--- a/public/fun/pack/pptx/family/가족소개_08_3대가족_처마밑제비집.pptx
+++ b/public/fun/pack/pptx/family/가족소개_08_3대가족_처마밑제비집.pptx
@@ -3347,7 +3347,7 @@
             <a:r>
               <a:rPr sz="3600" b="1" i="0">
                 <a:solidFill>
-                  <a:srgbClr val="16263B"/>
+                  <a:srgbClr val="1D4072"/>
                 </a:solidFill>
               </a:rPr>
               <a:t>우리 가족을 소개합니다</a:t>
@@ -3385,7 +3385,7 @@
             <a:r>
               <a:rPr sz="1700" b="0" i="1">
                 <a:solidFill>
-                  <a:srgbClr val="16263B"/>
+                  <a:srgbClr val="1D4072"/>
                 </a:solidFill>
               </a:rPr>
               <a:t>처마 밑 제비집을 올려다보던 삼대</a:t>
@@ -3445,7 +3445,7 @@
     <p:bg>
       <p:bgPr>
         <a:solidFill>
-          <a:srgbClr val="F0F4F9"/>
+          <a:srgbClr val="F3F7FC"/>
         </a:solidFill>
         <a:effectLst/>
       </p:bgPr>
@@ -3475,7 +3475,7 @@
             </a:avLst>
           </a:prstGeom>
           <a:solidFill>
-            <a:srgbClr val="D1DEF0"/>
+            <a:srgbClr val="D4E3F7"/>
           </a:solidFill>
           <a:ln>
             <a:noFill/>
@@ -3519,7 +3519,7 @@
             <a:r>
               <a:rPr sz="3000" b="1" i="0">
                 <a:solidFill>
-                  <a:srgbClr val="16263B"/>
+                  <a:srgbClr val="1D4072"/>
                 </a:solidFill>
               </a:rPr>
               <a:t>가족 구성원</a:t>
@@ -3542,11 +3542,11 @@
             <a:avLst/>
           </a:prstGeom>
           <a:solidFill>
-            <a:srgbClr val="D1DEF0"/>
+            <a:srgbClr val="D4E3F7"/>
           </a:solidFill>
           <a:ln w="19050">
             <a:solidFill>
-              <a:srgbClr val="2A476F"/>
+              <a:srgbClr val="4981D0"/>
             </a:solidFill>
             <a:prstDash val="dash"/>
           </a:ln>
@@ -3565,7 +3565,7 @@
             <a:r>
               <a:rPr sz="1200" b="0" i="0">
                 <a:solidFill>
-                  <a:srgbClr val="16263B"/>
+                  <a:srgbClr val="1D4072"/>
                 </a:solidFill>
               </a:rPr>
               <a:t>사진</a:t>
@@ -3603,7 +3603,7 @@
             <a:r>
               <a:rPr sz="1600" b="1" i="0">
                 <a:solidFill>
-                  <a:srgbClr val="16263B"/>
+                  <a:srgbClr val="1D4072"/>
                 </a:solidFill>
               </a:rPr>
               <a:t>할아버지</a:t>
@@ -3694,11 +3694,11 @@
             <a:avLst/>
           </a:prstGeom>
           <a:solidFill>
-            <a:srgbClr val="D1DEF0"/>
+            <a:srgbClr val="D4E3F7"/>
           </a:solidFill>
           <a:ln w="19050">
             <a:solidFill>
-              <a:srgbClr val="2A476F"/>
+              <a:srgbClr val="4981D0"/>
             </a:solidFill>
             <a:prstDash val="dash"/>
           </a:ln>
@@ -3717,7 +3717,7 @@
             <a:r>
               <a:rPr sz="1200" b="0" i="0">
                 <a:solidFill>
-                  <a:srgbClr val="16263B"/>
+                  <a:srgbClr val="1D4072"/>
                 </a:solidFill>
               </a:rPr>
               <a:t>사진</a:t>
@@ -3755,7 +3755,7 @@
             <a:r>
               <a:rPr sz="1600" b="1" i="0">
                 <a:solidFill>
-                  <a:srgbClr val="16263B"/>
+                  <a:srgbClr val="1D4072"/>
                 </a:solidFill>
               </a:rPr>
               <a:t>할머니</a:t>
@@ -3846,11 +3846,11 @@
             <a:avLst/>
           </a:prstGeom>
           <a:solidFill>
-            <a:srgbClr val="D1DEF0"/>
+            <a:srgbClr val="D4E3F7"/>
           </a:solidFill>
           <a:ln w="19050">
             <a:solidFill>
-              <a:srgbClr val="2A476F"/>
+              <a:srgbClr val="4981D0"/>
             </a:solidFill>
             <a:prstDash val="dash"/>
           </a:ln>
@@ -3869,7 +3869,7 @@
             <a:r>
               <a:rPr sz="1200" b="0" i="0">
                 <a:solidFill>
-                  <a:srgbClr val="16263B"/>
+                  <a:srgbClr val="1D4072"/>
                 </a:solidFill>
               </a:rPr>
               <a:t>사진</a:t>
@@ -3907,7 +3907,7 @@
             <a:r>
               <a:rPr sz="1600" b="1" i="0">
                 <a:solidFill>
-                  <a:srgbClr val="16263B"/>
+                  <a:srgbClr val="1D4072"/>
                 </a:solidFill>
               </a:rPr>
               <a:t>아빠</a:t>
@@ -3998,11 +3998,11 @@
             <a:avLst/>
           </a:prstGeom>
           <a:solidFill>
-            <a:srgbClr val="D1DEF0"/>
+            <a:srgbClr val="D4E3F7"/>
           </a:solidFill>
           <a:ln w="19050">
             <a:solidFill>
-              <a:srgbClr val="2A476F"/>
+              <a:srgbClr val="4981D0"/>
             </a:solidFill>
             <a:prstDash val="dash"/>
           </a:ln>
@@ -4021,7 +4021,7 @@
             <a:r>
               <a:rPr sz="1200" b="0" i="0">
                 <a:solidFill>
-                  <a:srgbClr val="16263B"/>
+                  <a:srgbClr val="1D4072"/>
                 </a:solidFill>
               </a:rPr>
               <a:t>사진</a:t>
@@ -4059,7 +4059,7 @@
             <a:r>
               <a:rPr sz="1600" b="1" i="0">
                 <a:solidFill>
-                  <a:srgbClr val="16263B"/>
+                  <a:srgbClr val="1D4072"/>
                 </a:solidFill>
               </a:rPr>
               <a:t>엄마</a:t>
@@ -4150,11 +4150,11 @@
             <a:avLst/>
           </a:prstGeom>
           <a:solidFill>
-            <a:srgbClr val="D1DEF0"/>
+            <a:srgbClr val="D4E3F7"/>
           </a:solidFill>
           <a:ln w="19050">
             <a:solidFill>
-              <a:srgbClr val="2A476F"/>
+              <a:srgbClr val="4981D0"/>
             </a:solidFill>
             <a:prstDash val="dash"/>
           </a:ln>
@@ -4173,7 +4173,7 @@
             <a:r>
               <a:rPr sz="1200" b="0" i="0">
                 <a:solidFill>
-                  <a:srgbClr val="16263B"/>
+                  <a:srgbClr val="1D4072"/>
                 </a:solidFill>
               </a:rPr>
               <a:t>사진</a:t>
@@ -4211,7 +4211,7 @@
             <a:r>
               <a:rPr sz="1600" b="1" i="0">
                 <a:solidFill>
-                  <a:srgbClr val="16263B"/>
+                  <a:srgbClr val="1D4072"/>
                 </a:solidFill>
               </a:rPr>
               <a:t>큰아이</a:t>
@@ -4302,11 +4302,11 @@
             <a:avLst/>
           </a:prstGeom>
           <a:solidFill>
-            <a:srgbClr val="D1DEF0"/>
+            <a:srgbClr val="D4E3F7"/>
           </a:solidFill>
           <a:ln w="19050">
             <a:solidFill>
-              <a:srgbClr val="2A476F"/>
+              <a:srgbClr val="4981D0"/>
             </a:solidFill>
             <a:prstDash val="dash"/>
           </a:ln>
@@ -4325,7 +4325,7 @@
             <a:r>
               <a:rPr sz="1200" b="0" i="0">
                 <a:solidFill>
-                  <a:srgbClr val="16263B"/>
+                  <a:srgbClr val="1D4072"/>
                 </a:solidFill>
               </a:rPr>
               <a:t>사진</a:t>
@@ -4363,7 +4363,7 @@
             <a:r>
               <a:rPr sz="1600" b="1" i="0">
                 <a:solidFill>
-                  <a:srgbClr val="16263B"/>
+                  <a:srgbClr val="1D4072"/>
                 </a:solidFill>
               </a:rPr>
               <a:t>작은아이</a:t>
@@ -4453,7 +4453,7 @@
     <p:bg>
       <p:bgPr>
         <a:solidFill>
-          <a:srgbClr val="F0F4F9"/>
+          <a:srgbClr val="F3F7FC"/>
         </a:solidFill>
         <a:effectLst/>
       </p:bgPr>
@@ -4483,7 +4483,7 @@
             </a:avLst>
           </a:prstGeom>
           <a:solidFill>
-            <a:srgbClr val="D1DEF0"/>
+            <a:srgbClr val="D4E3F7"/>
           </a:solidFill>
           <a:ln>
             <a:noFill/>
@@ -4527,7 +4527,7 @@
             <a:r>
               <a:rPr sz="3000" b="1" i="0">
                 <a:solidFill>
-                  <a:srgbClr val="16263B"/>
+                  <a:srgbClr val="1D4072"/>
                 </a:solidFill>
               </a:rPr>
               <a:t>우리 가족 이야기</a:t>
@@ -4550,7 +4550,7 @@
             <a:avLst/>
           </a:prstGeom>
           <a:solidFill>
-            <a:srgbClr val="D1DEF0"/>
+            <a:srgbClr val="D4E3F7"/>
           </a:solidFill>
           <a:ln>
             <a:noFill/>
@@ -4579,7 +4579,7 @@
             <a:avLst/>
           </a:prstGeom>
           <a:solidFill>
-            <a:srgbClr val="2A476F"/>
+            <a:srgbClr val="4981D0"/>
           </a:solidFill>
           <a:ln w="38100">
             <a:solidFill>
@@ -4625,7 +4625,7 @@
             <a:r>
               <a:rPr sz="1600" b="1" i="0">
                 <a:solidFill>
-                  <a:srgbClr val="2A476F"/>
+                  <a:srgbClr val="4981D0"/>
                 </a:solidFill>
               </a:rPr>
               <a:t>할아버지 할머니의 이야기</a:t>
@@ -4663,7 +4663,7 @@
             <a:r>
               <a:rPr sz="1800" b="1" i="0">
                 <a:solidFill>
-                  <a:srgbClr val="16263B"/>
+                  <a:srgbClr val="1D4072"/>
                 </a:solidFill>
               </a:rPr>
               <a:t>뿌리</a:t>
@@ -4724,7 +4724,7 @@
             <a:avLst/>
           </a:prstGeom>
           <a:solidFill>
-            <a:srgbClr val="2A476F"/>
+            <a:srgbClr val="4981D0"/>
           </a:solidFill>
           <a:ln w="38100">
             <a:solidFill>
@@ -4770,7 +4770,7 @@
             <a:r>
               <a:rPr sz="1600" b="1" i="0">
                 <a:solidFill>
-                  <a:srgbClr val="2A476F"/>
+                  <a:srgbClr val="4981D0"/>
                 </a:solidFill>
               </a:rPr>
               <a:t>부모가 된 날</a:t>
@@ -4808,7 +4808,7 @@
             <a:r>
               <a:rPr sz="1800" b="1" i="0">
                 <a:solidFill>
-                  <a:srgbClr val="16263B"/>
+                  <a:srgbClr val="1D4072"/>
                 </a:solidFill>
               </a:rPr>
               <a:t>새로운 가지</a:t>
@@ -4869,7 +4869,7 @@
             <a:avLst/>
           </a:prstGeom>
           <a:solidFill>
-            <a:srgbClr val="2A476F"/>
+            <a:srgbClr val="4981D0"/>
           </a:solidFill>
           <a:ln w="38100">
             <a:solidFill>
@@ -4915,7 +4915,7 @@
             <a:r>
               <a:rPr sz="1600" b="1" i="0">
                 <a:solidFill>
-                  <a:srgbClr val="2A476F"/>
+                  <a:srgbClr val="4981D0"/>
                 </a:solidFill>
               </a:rPr>
               <a:t>온 가족 모임</a:t>
@@ -4953,7 +4953,7 @@
             <a:r>
               <a:rPr sz="1800" b="1" i="0">
                 <a:solidFill>
-                  <a:srgbClr val="16263B"/>
+                  <a:srgbClr val="1D4072"/>
                 </a:solidFill>
               </a:rPr>
               <a:t>한자리에 모인 날</a:t>
@@ -5014,7 +5014,7 @@
             <a:avLst/>
           </a:prstGeom>
           <a:solidFill>
-            <a:srgbClr val="2A476F"/>
+            <a:srgbClr val="4981D0"/>
           </a:solidFill>
           <a:ln w="38100">
             <a:solidFill>
@@ -5060,7 +5060,7 @@
             <a:r>
               <a:rPr sz="1600" b="1" i="0">
                 <a:solidFill>
-                  <a:srgbClr val="2A476F"/>
+                  <a:srgbClr val="4981D0"/>
                 </a:solidFill>
               </a:rPr>
               <a:t>지금</a:t>
@@ -5098,7 +5098,7 @@
             <a:r>
               <a:rPr sz="1800" b="1" i="0">
                 <a:solidFill>
-                  <a:srgbClr val="16263B"/>
+                  <a:srgbClr val="1D4072"/>
                 </a:solidFill>
               </a:rPr>
               <a:t>오늘의 우리</a:t>
@@ -5158,7 +5158,7 @@
     <p:bg>
       <p:bgPr>
         <a:solidFill>
-          <a:srgbClr val="F0F4F9"/>
+          <a:srgbClr val="F3F7FC"/>
         </a:solidFill>
         <a:effectLst/>
       </p:bgPr>
@@ -5188,7 +5188,7 @@
             </a:avLst>
           </a:prstGeom>
           <a:solidFill>
-            <a:srgbClr val="D1DEF0"/>
+            <a:srgbClr val="D4E3F7"/>
           </a:solidFill>
           <a:ln>
             <a:noFill/>
@@ -5232,7 +5232,7 @@
             <a:r>
               <a:rPr sz="3000" b="1" i="0">
                 <a:solidFill>
-                  <a:srgbClr val="16263B"/>
+                  <a:srgbClr val="1D4072"/>
                 </a:solidFill>
               </a:rPr>
               <a:t>우리 가족의 약속</a:t>
@@ -5257,11 +5257,11 @@
             </a:avLst>
           </a:prstGeom>
           <a:solidFill>
-            <a:srgbClr val="F0F4F9"/>
+            <a:srgbClr val="F3F7FC"/>
           </a:solidFill>
           <a:ln w="12700">
             <a:solidFill>
-              <a:srgbClr val="D1DEF0"/>
+              <a:srgbClr val="D4E3F7"/>
             </a:solidFill>
           </a:ln>
         </p:spPr>
@@ -5288,7 +5288,7 @@
             <a:avLst/>
           </a:prstGeom>
           <a:solidFill>
-            <a:srgbClr val="2A476F"/>
+            <a:srgbClr val="4981D0"/>
           </a:solidFill>
           <a:ln>
             <a:noFill/>
@@ -5346,7 +5346,7 @@
             <a:r>
               <a:rPr sz="1800" b="1" i="0">
                 <a:solidFill>
-                  <a:srgbClr val="16263B"/>
+                  <a:srgbClr val="1D4072"/>
                 </a:solidFill>
               </a:rPr>
               <a:t>약속 1</a:t>
@@ -5409,11 +5409,11 @@
             </a:avLst>
           </a:prstGeom>
           <a:solidFill>
-            <a:srgbClr val="F0F4F9"/>
+            <a:srgbClr val="F3F7FC"/>
           </a:solidFill>
           <a:ln w="12700">
             <a:solidFill>
-              <a:srgbClr val="D1DEF0"/>
+              <a:srgbClr val="D4E3F7"/>
             </a:solidFill>
           </a:ln>
         </p:spPr>
@@ -5440,7 +5440,7 @@
             <a:avLst/>
           </a:prstGeom>
           <a:solidFill>
-            <a:srgbClr val="2A476F"/>
+            <a:srgbClr val="4981D0"/>
           </a:solidFill>
           <a:ln>
             <a:noFill/>
@@ -5498,7 +5498,7 @@
             <a:r>
               <a:rPr sz="1800" b="1" i="0">
                 <a:solidFill>
-                  <a:srgbClr val="16263B"/>
+                  <a:srgbClr val="1D4072"/>
                 </a:solidFill>
               </a:rPr>
               <a:t>약속 2</a:t>
@@ -5561,11 +5561,11 @@
             </a:avLst>
           </a:prstGeom>
           <a:solidFill>
-            <a:srgbClr val="F0F4F9"/>
+            <a:srgbClr val="F3F7FC"/>
           </a:solidFill>
           <a:ln w="12700">
             <a:solidFill>
-              <a:srgbClr val="D1DEF0"/>
+              <a:srgbClr val="D4E3F7"/>
             </a:solidFill>
           </a:ln>
         </p:spPr>
@@ -5592,7 +5592,7 @@
             <a:avLst/>
           </a:prstGeom>
           <a:solidFill>
-            <a:srgbClr val="2A476F"/>
+            <a:srgbClr val="4981D0"/>
           </a:solidFill>
           <a:ln>
             <a:noFill/>
@@ -5650,7 +5650,7 @@
             <a:r>
               <a:rPr sz="1800" b="1" i="0">
                 <a:solidFill>
-                  <a:srgbClr val="16263B"/>
+                  <a:srgbClr val="1D4072"/>
                 </a:solidFill>
               </a:rPr>
               <a:t>약속 3</a:t>
@@ -5710,7 +5710,7 @@
     <p:bg>
       <p:bgPr>
         <a:solidFill>
-          <a:srgbClr val="F0F4F9"/>
+          <a:srgbClr val="F3F7FC"/>
         </a:solidFill>
         <a:effectLst/>
       </p:bgPr>
@@ -5740,7 +5740,7 @@
             </a:avLst>
           </a:prstGeom>
           <a:solidFill>
-            <a:srgbClr val="D1DEF0"/>
+            <a:srgbClr val="D4E3F7"/>
           </a:solidFill>
           <a:ln>
             <a:noFill/>
@@ -5784,7 +5784,7 @@
             <a:r>
               <a:rPr sz="3000" b="1" i="0">
                 <a:solidFill>
-                  <a:srgbClr val="16263B"/>
+                  <a:srgbClr val="1D4072"/>
                 </a:solidFill>
               </a:rPr>
               <a:t>가족 사진</a:t>
@@ -5809,11 +5809,11 @@
             </a:avLst>
           </a:prstGeom>
           <a:solidFill>
-            <a:srgbClr val="D1DEF0"/>
+            <a:srgbClr val="D4E3F7"/>
           </a:solidFill>
           <a:ln w="19050">
             <a:solidFill>
-              <a:srgbClr val="2A476F"/>
+              <a:srgbClr val="4981D0"/>
             </a:solidFill>
             <a:prstDash val="dash"/>
           </a:ln>
@@ -5832,7 +5832,7 @@
             <a:r>
               <a:rPr sz="1200" b="0" i="0">
                 <a:solidFill>
-                  <a:srgbClr val="16263B"/>
+                  <a:srgbClr val="1D4072"/>
                 </a:solidFill>
               </a:rPr>
               <a:t>사진 1</a:t>
@@ -5857,11 +5857,11 @@
             </a:avLst>
           </a:prstGeom>
           <a:solidFill>
-            <a:srgbClr val="D1DEF0"/>
+            <a:srgbClr val="D4E3F7"/>
           </a:solidFill>
           <a:ln w="19050">
             <a:solidFill>
-              <a:srgbClr val="2A476F"/>
+              <a:srgbClr val="4981D0"/>
             </a:solidFill>
             <a:prstDash val="dash"/>
           </a:ln>
@@ -5880,7 +5880,7 @@
             <a:r>
               <a:rPr sz="1200" b="0" i="0">
                 <a:solidFill>
-                  <a:srgbClr val="16263B"/>
+                  <a:srgbClr val="1D4072"/>
                 </a:solidFill>
               </a:rPr>
               <a:t>사진 2</a:t>
@@ -5905,11 +5905,11 @@
             </a:avLst>
           </a:prstGeom>
           <a:solidFill>
-            <a:srgbClr val="D1DEF0"/>
+            <a:srgbClr val="D4E3F7"/>
           </a:solidFill>
           <a:ln w="19050">
             <a:solidFill>
-              <a:srgbClr val="2A476F"/>
+              <a:srgbClr val="4981D0"/>
             </a:solidFill>
             <a:prstDash val="dash"/>
           </a:ln>
@@ -5928,7 +5928,7 @@
             <a:r>
               <a:rPr sz="1200" b="0" i="0">
                 <a:solidFill>
-                  <a:srgbClr val="16263B"/>
+                  <a:srgbClr val="1D4072"/>
                 </a:solidFill>
               </a:rPr>
               <a:t>사진 3</a:t>
@@ -5953,11 +5953,11 @@
             </a:avLst>
           </a:prstGeom>
           <a:solidFill>
-            <a:srgbClr val="D1DEF0"/>
+            <a:srgbClr val="D4E3F7"/>
           </a:solidFill>
           <a:ln w="19050">
             <a:solidFill>
-              <a:srgbClr val="2A476F"/>
+              <a:srgbClr val="4981D0"/>
             </a:solidFill>
             <a:prstDash val="dash"/>
           </a:ln>
@@ -5976,7 +5976,7 @@
             <a:r>
               <a:rPr sz="1200" b="0" i="0">
                 <a:solidFill>
-                  <a:srgbClr val="16263B"/>
+                  <a:srgbClr val="1D4072"/>
                 </a:solidFill>
               </a:rPr>
               <a:t>사진 4</a:t>
@@ -6001,11 +6001,11 @@
             </a:avLst>
           </a:prstGeom>
           <a:solidFill>
-            <a:srgbClr val="D1DEF0"/>
+            <a:srgbClr val="D4E3F7"/>
           </a:solidFill>
           <a:ln w="19050">
             <a:solidFill>
-              <a:srgbClr val="2A476F"/>
+              <a:srgbClr val="4981D0"/>
             </a:solidFill>
             <a:prstDash val="dash"/>
           </a:ln>
@@ -6024,7 +6024,7 @@
             <a:r>
               <a:rPr sz="1200" b="0" i="0">
                 <a:solidFill>
-                  <a:srgbClr val="16263B"/>
+                  <a:srgbClr val="1D4072"/>
                 </a:solidFill>
               </a:rPr>
               <a:t>사진 5</a:t>
@@ -6049,11 +6049,11 @@
             </a:avLst>
           </a:prstGeom>
           <a:solidFill>
-            <a:srgbClr val="D1DEF0"/>
+            <a:srgbClr val="D4E3F7"/>
           </a:solidFill>
           <a:ln w="19050">
             <a:solidFill>
-              <a:srgbClr val="2A476F"/>
+              <a:srgbClr val="4981D0"/>
             </a:solidFill>
             <a:prstDash val="dash"/>
           </a:ln>
@@ -6072,7 +6072,7 @@
             <a:r>
               <a:rPr sz="1200" b="0" i="0">
                 <a:solidFill>
-                  <a:srgbClr val="16263B"/>
+                  <a:srgbClr val="1D4072"/>
                 </a:solidFill>
               </a:rPr>
               <a:t>사진 6</a:t>
@@ -6152,7 +6152,7 @@
             <a:r>
               <a:rPr sz="3600" b="1" i="0">
                 <a:solidFill>
-                  <a:srgbClr val="16263B"/>
+                  <a:srgbClr val="1D4072"/>
                 </a:solidFill>
               </a:rPr>
               <a:t>우리 가족 소개를 마칩니다</a:t>
@@ -6190,7 +6190,7 @@
             <a:r>
               <a:rPr sz="1700" b="0" i="1">
                 <a:solidFill>
-                  <a:srgbClr val="16263B"/>
+                  <a:srgbClr val="1D4072"/>
                 </a:solidFill>
               </a:rPr>
               <a:t>읽어 주셔서 고맙습니다</a:t>
@@ -6255,34 +6255,34 @@
         <a:sysClr val="window" lastClr="FFFFFF"/>
       </a:lt1>
       <a:dk2>
-        <a:srgbClr val="16263B"/>
+        <a:srgbClr val="1D4072"/>
       </a:dk2>
       <a:lt2>
-        <a:srgbClr val="F0F4F9"/>
+        <a:srgbClr val="F3F7FC"/>
       </a:lt2>
       <a:accent1>
-        <a:srgbClr val="2A476F"/>
+        <a:srgbClr val="4981D0"/>
       </a:accent1>
       <a:accent2>
-        <a:srgbClr val="91423B"/>
+        <a:srgbClr val="339941"/>
       </a:accent2>
       <a:accent3>
-        <a:srgbClr val="16263B"/>
+        <a:srgbClr val="1D4072"/>
       </a:accent3>
       <a:accent4>
-        <a:srgbClr val="D1DEF0"/>
+        <a:srgbClr val="D4E3F7"/>
       </a:accent4>
       <a:accent5>
-        <a:srgbClr val="5E4455"/>
+        <a:srgbClr val="3E8D88"/>
       </a:accent5>
       <a:accent6>
-        <a:srgbClr val="737D89"/>
+        <a:srgbClr val="778CAA"/>
       </a:accent6>
       <a:hlink>
-        <a:srgbClr val="2A476F"/>
+        <a:srgbClr val="4981D0"/>
       </a:hlink>
       <a:folHlink>
-        <a:srgbClr val="16263B"/>
+        <a:srgbClr val="1D4072"/>
       </a:folHlink>
     </a:clrScheme>
     <a:fontScheme name="Office">

--- a/public/fun/pack/pptx/family/가족소개_08_3대가족_처마밑제비집.pptx
+++ b/public/fun/pack/pptx/family/가족소개_08_3대가족_처마밑제비집.pptx
@@ -3286,6 +3286,14 @@
 <file path=ppt/slides/slide1.xml><?xml version="1.0" encoding="utf-8"?>
 <p:sld xmlns:a="http://schemas.openxmlformats.org/drawingml/2006/main" xmlns:p="http://schemas.openxmlformats.org/presentationml/2006/main" xmlns:r="http://schemas.openxmlformats.org/officeDocument/2006/relationships">
   <p:cSld>
+    <p:bg>
+      <p:bgPr>
+        <a:solidFill>
+          <a:srgbClr val="EAF2FD"/>
+        </a:solidFill>
+        <a:effectLst/>
+      </p:bgPr>
+    </p:bg>
     <p:spTree>
       <p:nvGrpSpPr>
         <p:cNvPr id="1" name=""/>
@@ -3293,30 +3301,119 @@
         <p:nvPr/>
       </p:nvGrpSpPr>
       <p:grpSpPr/>
-      <p:pic>
-        <p:nvPicPr>
-          <p:cNvPr id="3" name="표지 그림" descr="family-08.jpg"/>
-          <p:cNvPicPr>
-            <a:picLocks noChangeAspect="1"/>
-          </p:cNvPicPr>
-          <p:nvPr/>
-        </p:nvPicPr>
-        <p:blipFill>
-          <a:blip r:embed="rId2"/>
-          <a:stretch>
-            <a:fillRect/>
-          </a:stretch>
-        </p:blipFill>
-        <p:spPr>
-          <a:xfrm>
-            <a:off x="0" y="0"/>
-            <a:ext cx="12191695" cy="6858000"/>
+      <p:sp>
+        <p:nvSpPr>
+          <p:cNvPr id="3" name="사진 자리"/>
+          <p:cNvSpPr/>
+          <p:nvPr/>
+        </p:nvSpPr>
+        <p:spPr>
+          <a:xfrm>
+            <a:off x="7558851" y="685800"/>
+            <a:ext cx="3169840" cy="5486400"/>
+          </a:xfrm>
+          <a:prstGeom prst="round2SameRect">
+            <a:avLst>
+              <a:gd name="adj1" fmla="val 50000"/>
+              <a:gd name="adj2" fmla="val 0"/>
+            </a:avLst>
+          </a:prstGeom>
+          <a:solidFill>
+            <a:srgbClr val="A6C6F2"/>
+          </a:solidFill>
+          <a:ln>
+            <a:noFill/>
+          </a:ln>
+        </p:spPr>
+        <p:txBody>
+          <a:bodyPr rtlCol="0" anchor="ctr" wrap="square" lIns="54864" rIns="54864" tIns="27432" bIns="27432">
+            <a:noAutofit/>
+          </a:bodyPr>
+          <a:lstStyle/>
+          <a:p>
+            <a:pPr algn="ctr">
+              <a:lnSpc>
+                <a:spcPct val="100000"/>
+              </a:lnSpc>
+            </a:pPr>
+            <a:r>
+              <a:rPr sz="1400" b="0" i="0">
+                <a:solidFill>
+                  <a:srgbClr val="273549"/>
+                </a:solidFill>
+              </a:rPr>
+              <a:t>사진을 넣어 주세요</a:t>
+            </a:r>
+          </a:p>
+        </p:txBody>
+      </p:sp>
+      <p:sp>
+        <p:nvSpPr>
+          <p:cNvPr id="4" name="장식"/>
+          <p:cNvSpPr/>
+          <p:nvPr/>
+        </p:nvSpPr>
+        <p:spPr>
+          <a:xfrm>
+            <a:off x="6827349" y="4251960"/>
+            <a:ext cx="1005840" cy="1005840"/>
+          </a:xfrm>
+          <a:prstGeom prst="ellipse">
+            <a:avLst/>
+          </a:prstGeom>
+          <a:solidFill>
+            <a:srgbClr val="A6C6F2"/>
+          </a:solidFill>
+          <a:ln>
+            <a:noFill/>
+          </a:ln>
+        </p:spPr>
+        <p:txBody>
+          <a:bodyPr rtlCol="0" anchor="ctr"/>
+          <a:lstStyle/>
+          <a:p>
+            <a:pPr algn="ctr"/>
+          </a:p>
+        </p:txBody>
+      </p:sp>
+      <p:sp>
+        <p:nvSpPr>
+          <p:cNvPr id="5" name="라벨"/>
+          <p:cNvSpPr txBox="1"/>
+          <p:nvPr/>
+        </p:nvSpPr>
+        <p:spPr>
+          <a:xfrm>
+            <a:off x="822960" y="2148840"/>
+            <a:ext cx="5608179" cy="274320"/>
           </a:xfrm>
           <a:prstGeom prst="rect">
             <a:avLst/>
           </a:prstGeom>
-        </p:spPr>
-      </p:pic>
+          <a:noFill/>
+        </p:spPr>
+        <p:txBody>
+          <a:bodyPr wrap="square" lIns="54864" rIns="54864" tIns="27432" bIns="27432" anchor="t">
+            <a:noAutofit/>
+          </a:bodyPr>
+          <a:lstStyle/>
+          <a:p>
+            <a:pPr algn="l">
+              <a:lnSpc>
+                <a:spcPct val="115000"/>
+              </a:lnSpc>
+            </a:pPr>
+            <a:r>
+              <a:rPr sz="1000" b="1" i="0" spc="250">
+                <a:solidFill>
+                  <a:srgbClr val="26231F"/>
+                </a:solidFill>
+              </a:rPr>
+              <a:t>FAMILY ALBUM</a:t>
+            </a:r>
+          </a:p>
+        </p:txBody>
+      </p:sp>
       <p:sp>
         <p:nvSpPr>
           <p:cNvPr id="2" name="Title 1"/>
@@ -3329,8 +3426,8 @@
         </p:nvSpPr>
         <p:spPr>
           <a:xfrm>
-            <a:off x="853418" y="2057400"/>
-            <a:ext cx="6095847" cy="1554480"/>
+            <a:off x="822960" y="2606040"/>
+            <a:ext cx="5608179" cy="1188720"/>
           </a:xfrm>
         </p:spPr>
         <p:txBody>
@@ -3345,9 +3442,9 @@
               </a:lnSpc>
             </a:pPr>
             <a:r>
-              <a:rPr sz="3600" b="1" i="0">
-                <a:solidFill>
-                  <a:srgbClr val="1D4072"/>
+              <a:rPr sz="4000" b="1" i="0">
+                <a:solidFill>
+                  <a:srgbClr val="26231F"/>
                 </a:solidFill>
               </a:rPr>
               <a:t>우리 가족을 소개합니다</a:t>
@@ -3357,14 +3454,14 @@
       </p:sp>
       <p:sp>
         <p:nvSpPr>
-          <p:cNvPr id="4" name="한 줄 문구"/>
+          <p:cNvPr id="6" name="한 줄 문구"/>
           <p:cNvSpPr txBox="1"/>
           <p:nvPr/>
         </p:nvSpPr>
         <p:spPr>
           <a:xfrm>
-            <a:off x="853418" y="3749039"/>
-            <a:ext cx="6095847" cy="822960"/>
+            <a:off x="822960" y="3886200"/>
+            <a:ext cx="5608179" cy="822960"/>
           </a:xfrm>
           <a:prstGeom prst="rect">
             <a:avLst/>
@@ -3383,9 +3480,9 @@
               </a:lnSpc>
             </a:pPr>
             <a:r>
-              <a:rPr sz="1700" b="0" i="1">
-                <a:solidFill>
-                  <a:srgbClr val="1D4072"/>
+              <a:rPr sz="1700" b="0" i="0">
+                <a:solidFill>
+                  <a:srgbClr val="26231F"/>
                 </a:solidFill>
               </a:rPr>
               <a:t>처마 밑 제비집을 올려다보던 삼대</a:t>
@@ -3395,14 +3492,14 @@
       </p:sp>
       <p:sp>
         <p:nvSpPr>
-          <p:cNvPr id="5" name="안내 문구"/>
+          <p:cNvPr id="7" name="안내 문구"/>
           <p:cNvSpPr txBox="1"/>
           <p:nvPr/>
         </p:nvSpPr>
         <p:spPr>
           <a:xfrm>
-            <a:off x="853418" y="4617720"/>
-            <a:ext cx="6095847" cy="914400"/>
+            <a:off x="822960" y="4754880"/>
+            <a:ext cx="5608179" cy="914400"/>
           </a:xfrm>
           <a:prstGeom prst="rect">
             <a:avLst/>
@@ -3423,10 +3520,10 @@
             <a:r>
               <a:rPr sz="1400" b="0" i="0">
                 <a:solidFill>
-                  <a:srgbClr val="666666"/>
-                </a:solidFill>
-              </a:rPr>
-              <a:t>3대 가족 · 2027. 00. 00</a:t>
+                  <a:srgbClr val="26231F"/>
+                </a:solidFill>
+              </a:rPr>
+              <a:t>3대 가족 · 날짜 입력</a:t>
             </a:r>
           </a:p>
         </p:txBody>
@@ -3445,7 +3542,7 @@
     <p:bg>
       <p:bgPr>
         <a:solidFill>
-          <a:srgbClr val="F3F7FC"/>
+          <a:srgbClr val="FAFBFD"/>
         </a:solidFill>
         <a:effectLst/>
       </p:bgPr>
@@ -3464,18 +3561,82 @@
           <p:nvPr/>
         </p:nvSpPr>
         <p:spPr>
-          <a:xfrm rot="10800000">
-            <a:off x="10637215" y="0"/>
-            <a:ext cx="914400" cy="1554480"/>
-          </a:xfrm>
-          <a:prstGeom prst="round2SameRect">
-            <a:avLst>
-              <a:gd name="adj1" fmla="val 50000"/>
-              <a:gd name="adj2" fmla="val 0"/>
-            </a:avLst>
+          <a:xfrm>
+            <a:off x="640080" y="566928"/>
+            <a:ext cx="10911535" cy="10972"/>
+          </a:xfrm>
+          <a:prstGeom prst="rect">
+            <a:avLst/>
           </a:prstGeom>
           <a:solidFill>
-            <a:srgbClr val="D4E3F7"/>
+            <a:srgbClr val="26231F"/>
+          </a:solidFill>
+          <a:ln>
+            <a:noFill/>
+          </a:ln>
+        </p:spPr>
+        <p:txBody>
+          <a:bodyPr rtlCol="0" anchor="ctr"/>
+          <a:lstStyle/>
+          <a:p>
+            <a:pPr algn="ctr"/>
+          </a:p>
+        </p:txBody>
+      </p:sp>
+      <p:sp>
+        <p:nvSpPr>
+          <p:cNvPr id="4" name="상단 라벨"/>
+          <p:cNvSpPr txBox="1"/>
+          <p:nvPr/>
+        </p:nvSpPr>
+        <p:spPr>
+          <a:xfrm>
+            <a:off x="640080" y="237744"/>
+            <a:ext cx="5486400" cy="274320"/>
+          </a:xfrm>
+          <a:prstGeom prst="rect">
+            <a:avLst/>
+          </a:prstGeom>
+          <a:noFill/>
+        </p:spPr>
+        <p:txBody>
+          <a:bodyPr wrap="square" lIns="54864" rIns="54864" tIns="27432" bIns="27432" anchor="ctr">
+            <a:noAutofit/>
+          </a:bodyPr>
+          <a:lstStyle/>
+          <a:p>
+            <a:pPr algn="l">
+              <a:lnSpc>
+                <a:spcPct val="115000"/>
+              </a:lnSpc>
+            </a:pPr>
+            <a:r>
+              <a:rPr sz="900" b="1" i="0" spc="250">
+                <a:solidFill>
+                  <a:srgbClr val="26231F"/>
+                </a:solidFill>
+              </a:rPr>
+              <a:t>FAMILY ALBUM</a:t>
+            </a:r>
+          </a:p>
+        </p:txBody>
+      </p:sp>
+      <p:sp>
+        <p:nvSpPr>
+          <p:cNvPr id="5" name="포인트"/>
+          <p:cNvSpPr/>
+          <p:nvPr/>
+        </p:nvSpPr>
+        <p:spPr>
+          <a:xfrm>
+            <a:off x="11204143" y="246888"/>
+            <a:ext cx="237744" cy="237744"/>
+          </a:xfrm>
+          <a:prstGeom prst="donut">
+            <a:avLst/>
+          </a:prstGeom>
+          <a:solidFill>
+            <a:srgbClr val="97BBED"/>
           </a:solidFill>
           <a:ln>
             <a:noFill/>
@@ -3501,8 +3662,8 @@
         </p:nvSpPr>
         <p:spPr>
           <a:xfrm>
-            <a:off x="640080" y="457200"/>
-            <a:ext cx="9722815" cy="868680"/>
+            <a:off x="640080" y="731520"/>
+            <a:ext cx="10911535" cy="822960"/>
           </a:xfrm>
         </p:spPr>
         <p:txBody>
@@ -3519,7 +3680,7 @@
             <a:r>
               <a:rPr sz="3000" b="1" i="0">
                 <a:solidFill>
-                  <a:srgbClr val="1D4072"/>
+                  <a:srgbClr val="26231F"/>
                 </a:solidFill>
               </a:rPr>
               <a:t>가족 구성원</a:t>
@@ -3529,25 +3690,23 @@
       </p:sp>
       <p:sp>
         <p:nvSpPr>
-          <p:cNvPr id="4" name="사진 자리"/>
+          <p:cNvPr id="6" name="사진 자리"/>
           <p:cNvSpPr/>
           <p:nvPr/>
         </p:nvSpPr>
         <p:spPr>
           <a:xfrm>
-            <a:off x="777240" y="1600200"/>
+            <a:off x="777240" y="1783080"/>
             <a:ext cx="1353769" cy="1353769"/>
           </a:xfrm>
           <a:prstGeom prst="ellipse">
             <a:avLst/>
           </a:prstGeom>
           <a:solidFill>
-            <a:srgbClr val="D4E3F7"/>
+            <a:srgbClr val="D1E2FA"/>
           </a:solidFill>
           <a:ln w="19050">
-            <a:solidFill>
-              <a:srgbClr val="4981D0"/>
-            </a:solidFill>
+            <a:noFill/>
             <a:prstDash val="dash"/>
           </a:ln>
         </p:spPr>
@@ -3565,7 +3724,7 @@
             <a:r>
               <a:rPr sz="1200" b="0" i="0">
                 <a:solidFill>
-                  <a:srgbClr val="1D4072"/>
+                  <a:srgbClr val="8E8780"/>
                 </a:solidFill>
               </a:rPr>
               <a:t>사진</a:t>
@@ -3575,13 +3734,13 @@
       </p:sp>
       <p:sp>
         <p:nvSpPr>
-          <p:cNvPr id="5" name="TextBox 4"/>
+          <p:cNvPr id="7" name="TextBox 6"/>
           <p:cNvSpPr txBox="1"/>
           <p:nvPr/>
         </p:nvSpPr>
         <p:spPr>
           <a:xfrm>
-            <a:off x="640080" y="3045409"/>
+            <a:off x="640080" y="3228289"/>
             <a:ext cx="1628089" cy="411480"/>
           </a:xfrm>
           <a:prstGeom prst="rect">
@@ -3603,7 +3762,7 @@
             <a:r>
               <a:rPr sz="1600" b="1" i="0">
                 <a:solidFill>
-                  <a:srgbClr val="1D4072"/>
+                  <a:srgbClr val="273549"/>
                 </a:solidFill>
               </a:rPr>
               <a:t>할아버지</a:t>
@@ -3613,14 +3772,14 @@
       </p:sp>
       <p:sp>
         <p:nvSpPr>
-          <p:cNvPr id="6" name="TextBox 5"/>
+          <p:cNvPr id="8" name="TextBox 7"/>
           <p:cNvSpPr txBox="1"/>
           <p:nvPr/>
         </p:nvSpPr>
         <p:spPr>
           <a:xfrm>
-            <a:off x="731519" y="3502609"/>
-            <a:ext cx="1445209" cy="2898190"/>
+            <a:off x="731519" y="3685489"/>
+            <a:ext cx="1445209" cy="2669590"/>
           </a:xfrm>
           <a:prstGeom prst="rect">
             <a:avLst/>
@@ -3681,25 +3840,23 @@
       </p:sp>
       <p:sp>
         <p:nvSpPr>
-          <p:cNvPr id="7" name="사진 자리"/>
+          <p:cNvPr id="9" name="사진 자리"/>
           <p:cNvSpPr/>
           <p:nvPr/>
         </p:nvSpPr>
         <p:spPr>
           <a:xfrm>
-            <a:off x="2633929" y="1600200"/>
+            <a:off x="2633929" y="1783080"/>
             <a:ext cx="1353769" cy="1353769"/>
           </a:xfrm>
           <a:prstGeom prst="ellipse">
             <a:avLst/>
           </a:prstGeom>
           <a:solidFill>
-            <a:srgbClr val="D4E3F7"/>
+            <a:srgbClr val="D1E2FA"/>
           </a:solidFill>
           <a:ln w="19050">
-            <a:solidFill>
-              <a:srgbClr val="4981D0"/>
-            </a:solidFill>
+            <a:noFill/>
             <a:prstDash val="dash"/>
           </a:ln>
         </p:spPr>
@@ -3717,7 +3874,7 @@
             <a:r>
               <a:rPr sz="1200" b="0" i="0">
                 <a:solidFill>
-                  <a:srgbClr val="1D4072"/>
+                  <a:srgbClr val="8E8780"/>
                 </a:solidFill>
               </a:rPr>
               <a:t>사진</a:t>
@@ -3727,13 +3884,13 @@
       </p:sp>
       <p:sp>
         <p:nvSpPr>
-          <p:cNvPr id="8" name="TextBox 7"/>
+          <p:cNvPr id="10" name="TextBox 9"/>
           <p:cNvSpPr txBox="1"/>
           <p:nvPr/>
         </p:nvSpPr>
         <p:spPr>
           <a:xfrm>
-            <a:off x="2496769" y="3045409"/>
+            <a:off x="2496769" y="3228289"/>
             <a:ext cx="1628089" cy="411480"/>
           </a:xfrm>
           <a:prstGeom prst="rect">
@@ -3755,7 +3912,7 @@
             <a:r>
               <a:rPr sz="1600" b="1" i="0">
                 <a:solidFill>
-                  <a:srgbClr val="1D4072"/>
+                  <a:srgbClr val="273549"/>
                 </a:solidFill>
               </a:rPr>
               <a:t>할머니</a:t>
@@ -3765,14 +3922,14 @@
       </p:sp>
       <p:sp>
         <p:nvSpPr>
-          <p:cNvPr id="9" name="TextBox 8"/>
+          <p:cNvPr id="11" name="TextBox 10"/>
           <p:cNvSpPr txBox="1"/>
           <p:nvPr/>
         </p:nvSpPr>
         <p:spPr>
           <a:xfrm>
-            <a:off x="2588209" y="3502609"/>
-            <a:ext cx="1445209" cy="2898190"/>
+            <a:off x="2588209" y="3685489"/>
+            <a:ext cx="1445209" cy="2669590"/>
           </a:xfrm>
           <a:prstGeom prst="rect">
             <a:avLst/>
@@ -3833,25 +3990,23 @@
       </p:sp>
       <p:sp>
         <p:nvSpPr>
-          <p:cNvPr id="10" name="사진 자리"/>
+          <p:cNvPr id="12" name="사진 자리"/>
           <p:cNvSpPr/>
           <p:nvPr/>
         </p:nvSpPr>
         <p:spPr>
           <a:xfrm>
-            <a:off x="4490618" y="1600200"/>
+            <a:off x="4490618" y="1783080"/>
             <a:ext cx="1353769" cy="1353769"/>
           </a:xfrm>
           <a:prstGeom prst="ellipse">
             <a:avLst/>
           </a:prstGeom>
           <a:solidFill>
-            <a:srgbClr val="D4E3F7"/>
+            <a:srgbClr val="D1E2FA"/>
           </a:solidFill>
           <a:ln w="19050">
-            <a:solidFill>
-              <a:srgbClr val="4981D0"/>
-            </a:solidFill>
+            <a:noFill/>
             <a:prstDash val="dash"/>
           </a:ln>
         </p:spPr>
@@ -3869,7 +4024,7 @@
             <a:r>
               <a:rPr sz="1200" b="0" i="0">
                 <a:solidFill>
-                  <a:srgbClr val="1D4072"/>
+                  <a:srgbClr val="8E8780"/>
                 </a:solidFill>
               </a:rPr>
               <a:t>사진</a:t>
@@ -3879,13 +4034,13 @@
       </p:sp>
       <p:sp>
         <p:nvSpPr>
-          <p:cNvPr id="11" name="TextBox 10"/>
+          <p:cNvPr id="13" name="TextBox 12"/>
           <p:cNvSpPr txBox="1"/>
           <p:nvPr/>
         </p:nvSpPr>
         <p:spPr>
           <a:xfrm>
-            <a:off x="4353458" y="3045409"/>
+            <a:off x="4353458" y="3228289"/>
             <a:ext cx="1628089" cy="411480"/>
           </a:xfrm>
           <a:prstGeom prst="rect">
@@ -3907,7 +4062,7 @@
             <a:r>
               <a:rPr sz="1600" b="1" i="0">
                 <a:solidFill>
-                  <a:srgbClr val="1D4072"/>
+                  <a:srgbClr val="273549"/>
                 </a:solidFill>
               </a:rPr>
               <a:t>아빠</a:t>
@@ -3917,14 +4072,14 @@
       </p:sp>
       <p:sp>
         <p:nvSpPr>
-          <p:cNvPr id="12" name="TextBox 11"/>
+          <p:cNvPr id="14" name="TextBox 13"/>
           <p:cNvSpPr txBox="1"/>
           <p:nvPr/>
         </p:nvSpPr>
         <p:spPr>
           <a:xfrm>
-            <a:off x="4444898" y="3502609"/>
-            <a:ext cx="1445209" cy="2898190"/>
+            <a:off x="4444898" y="3685489"/>
+            <a:ext cx="1445209" cy="2669590"/>
           </a:xfrm>
           <a:prstGeom prst="rect">
             <a:avLst/>
@@ -3985,25 +4140,23 @@
       </p:sp>
       <p:sp>
         <p:nvSpPr>
-          <p:cNvPr id="13" name="사진 자리"/>
+          <p:cNvPr id="15" name="사진 자리"/>
           <p:cNvSpPr/>
           <p:nvPr/>
         </p:nvSpPr>
         <p:spPr>
           <a:xfrm>
-            <a:off x="6347307" y="1600200"/>
+            <a:off x="6347307" y="1783080"/>
             <a:ext cx="1353769" cy="1353769"/>
           </a:xfrm>
           <a:prstGeom prst="ellipse">
             <a:avLst/>
           </a:prstGeom>
           <a:solidFill>
-            <a:srgbClr val="D4E3F7"/>
+            <a:srgbClr val="D1E2FA"/>
           </a:solidFill>
           <a:ln w="19050">
-            <a:solidFill>
-              <a:srgbClr val="4981D0"/>
-            </a:solidFill>
+            <a:noFill/>
             <a:prstDash val="dash"/>
           </a:ln>
         </p:spPr>
@@ -4021,7 +4174,7 @@
             <a:r>
               <a:rPr sz="1200" b="0" i="0">
                 <a:solidFill>
-                  <a:srgbClr val="1D4072"/>
+                  <a:srgbClr val="8E8780"/>
                 </a:solidFill>
               </a:rPr>
               <a:t>사진</a:t>
@@ -4031,13 +4184,13 @@
       </p:sp>
       <p:sp>
         <p:nvSpPr>
-          <p:cNvPr id="14" name="TextBox 13"/>
+          <p:cNvPr id="16" name="TextBox 15"/>
           <p:cNvSpPr txBox="1"/>
           <p:nvPr/>
         </p:nvSpPr>
         <p:spPr>
           <a:xfrm>
-            <a:off x="6210147" y="3045409"/>
+            <a:off x="6210147" y="3228289"/>
             <a:ext cx="1628089" cy="411480"/>
           </a:xfrm>
           <a:prstGeom prst="rect">
@@ -4059,7 +4212,7 @@
             <a:r>
               <a:rPr sz="1600" b="1" i="0">
                 <a:solidFill>
-                  <a:srgbClr val="1D4072"/>
+                  <a:srgbClr val="273549"/>
                 </a:solidFill>
               </a:rPr>
               <a:t>엄마</a:t>
@@ -4069,14 +4222,14 @@
       </p:sp>
       <p:sp>
         <p:nvSpPr>
-          <p:cNvPr id="15" name="TextBox 14"/>
+          <p:cNvPr id="17" name="TextBox 16"/>
           <p:cNvSpPr txBox="1"/>
           <p:nvPr/>
         </p:nvSpPr>
         <p:spPr>
           <a:xfrm>
-            <a:off x="6301587" y="3502609"/>
-            <a:ext cx="1445209" cy="2898190"/>
+            <a:off x="6301587" y="3685489"/>
+            <a:ext cx="1445209" cy="2669590"/>
           </a:xfrm>
           <a:prstGeom prst="rect">
             <a:avLst/>
@@ -4137,25 +4290,23 @@
       </p:sp>
       <p:sp>
         <p:nvSpPr>
-          <p:cNvPr id="16" name="사진 자리"/>
+          <p:cNvPr id="18" name="사진 자리"/>
           <p:cNvSpPr/>
           <p:nvPr/>
         </p:nvSpPr>
         <p:spPr>
           <a:xfrm>
-            <a:off x="8203996" y="1600200"/>
+            <a:off x="8203996" y="1783080"/>
             <a:ext cx="1353769" cy="1353769"/>
           </a:xfrm>
           <a:prstGeom prst="ellipse">
             <a:avLst/>
           </a:prstGeom>
           <a:solidFill>
-            <a:srgbClr val="D4E3F7"/>
+            <a:srgbClr val="D1E2FA"/>
           </a:solidFill>
           <a:ln w="19050">
-            <a:solidFill>
-              <a:srgbClr val="4981D0"/>
-            </a:solidFill>
+            <a:noFill/>
             <a:prstDash val="dash"/>
           </a:ln>
         </p:spPr>
@@ -4173,7 +4324,7 @@
             <a:r>
               <a:rPr sz="1200" b="0" i="0">
                 <a:solidFill>
-                  <a:srgbClr val="1D4072"/>
+                  <a:srgbClr val="8E8780"/>
                 </a:solidFill>
               </a:rPr>
               <a:t>사진</a:t>
@@ -4183,13 +4334,13 @@
       </p:sp>
       <p:sp>
         <p:nvSpPr>
-          <p:cNvPr id="17" name="TextBox 16"/>
+          <p:cNvPr id="19" name="TextBox 18"/>
           <p:cNvSpPr txBox="1"/>
           <p:nvPr/>
         </p:nvSpPr>
         <p:spPr>
           <a:xfrm>
-            <a:off x="8066836" y="3045409"/>
+            <a:off x="8066836" y="3228289"/>
             <a:ext cx="1628089" cy="411480"/>
           </a:xfrm>
           <a:prstGeom prst="rect">
@@ -4211,7 +4362,7 @@
             <a:r>
               <a:rPr sz="1600" b="1" i="0">
                 <a:solidFill>
-                  <a:srgbClr val="1D4072"/>
+                  <a:srgbClr val="273549"/>
                 </a:solidFill>
               </a:rPr>
               <a:t>큰아이</a:t>
@@ -4221,14 +4372,14 @@
       </p:sp>
       <p:sp>
         <p:nvSpPr>
-          <p:cNvPr id="18" name="TextBox 17"/>
+          <p:cNvPr id="20" name="TextBox 19"/>
           <p:cNvSpPr txBox="1"/>
           <p:nvPr/>
         </p:nvSpPr>
         <p:spPr>
           <a:xfrm>
-            <a:off x="8158276" y="3502609"/>
-            <a:ext cx="1445209" cy="2898190"/>
+            <a:off x="8158276" y="3685489"/>
+            <a:ext cx="1445209" cy="2669590"/>
           </a:xfrm>
           <a:prstGeom prst="rect">
             <a:avLst/>
@@ -4289,25 +4440,23 @@
       </p:sp>
       <p:sp>
         <p:nvSpPr>
-          <p:cNvPr id="19" name="사진 자리"/>
+          <p:cNvPr id="21" name="사진 자리"/>
           <p:cNvSpPr/>
           <p:nvPr/>
         </p:nvSpPr>
         <p:spPr>
           <a:xfrm>
-            <a:off x="10060686" y="1600200"/>
+            <a:off x="10060686" y="1783080"/>
             <a:ext cx="1353769" cy="1353769"/>
           </a:xfrm>
           <a:prstGeom prst="ellipse">
             <a:avLst/>
           </a:prstGeom>
           <a:solidFill>
-            <a:srgbClr val="D4E3F7"/>
+            <a:srgbClr val="D1E2FA"/>
           </a:solidFill>
           <a:ln w="19050">
-            <a:solidFill>
-              <a:srgbClr val="4981D0"/>
-            </a:solidFill>
+            <a:noFill/>
             <a:prstDash val="dash"/>
           </a:ln>
         </p:spPr>
@@ -4325,7 +4474,7 @@
             <a:r>
               <a:rPr sz="1200" b="0" i="0">
                 <a:solidFill>
-                  <a:srgbClr val="1D4072"/>
+                  <a:srgbClr val="8E8780"/>
                 </a:solidFill>
               </a:rPr>
               <a:t>사진</a:t>
@@ -4335,13 +4484,13 @@
       </p:sp>
       <p:sp>
         <p:nvSpPr>
-          <p:cNvPr id="20" name="TextBox 19"/>
+          <p:cNvPr id="22" name="TextBox 21"/>
           <p:cNvSpPr txBox="1"/>
           <p:nvPr/>
         </p:nvSpPr>
         <p:spPr>
           <a:xfrm>
-            <a:off x="9923526" y="3045409"/>
+            <a:off x="9923526" y="3228289"/>
             <a:ext cx="1628089" cy="411480"/>
           </a:xfrm>
           <a:prstGeom prst="rect">
@@ -4363,7 +4512,7 @@
             <a:r>
               <a:rPr sz="1600" b="1" i="0">
                 <a:solidFill>
-                  <a:srgbClr val="1D4072"/>
+                  <a:srgbClr val="273549"/>
                 </a:solidFill>
               </a:rPr>
               <a:t>작은아이</a:t>
@@ -4373,14 +4522,14 @@
       </p:sp>
       <p:sp>
         <p:nvSpPr>
-          <p:cNvPr id="21" name="TextBox 20"/>
+          <p:cNvPr id="23" name="TextBox 22"/>
           <p:cNvSpPr txBox="1"/>
           <p:nvPr/>
         </p:nvSpPr>
         <p:spPr>
           <a:xfrm>
-            <a:off x="10014965" y="3502609"/>
-            <a:ext cx="1445209" cy="2898190"/>
+            <a:off x="10014965" y="3685489"/>
+            <a:ext cx="1445209" cy="2669590"/>
           </a:xfrm>
           <a:prstGeom prst="rect">
             <a:avLst/>
@@ -4453,7 +4602,7 @@
     <p:bg>
       <p:bgPr>
         <a:solidFill>
-          <a:srgbClr val="F3F7FC"/>
+          <a:srgbClr val="FAFBFD"/>
         </a:solidFill>
         <a:effectLst/>
       </p:bgPr>
@@ -4472,18 +4621,82 @@
           <p:nvPr/>
         </p:nvSpPr>
         <p:spPr>
-          <a:xfrm rot="10800000">
-            <a:off x="10637215" y="0"/>
-            <a:ext cx="914400" cy="1554480"/>
-          </a:xfrm>
-          <a:prstGeom prst="round2SameRect">
-            <a:avLst>
-              <a:gd name="adj1" fmla="val 50000"/>
-              <a:gd name="adj2" fmla="val 0"/>
-            </a:avLst>
+          <a:xfrm>
+            <a:off x="640080" y="566928"/>
+            <a:ext cx="10911535" cy="10972"/>
+          </a:xfrm>
+          <a:prstGeom prst="rect">
+            <a:avLst/>
           </a:prstGeom>
           <a:solidFill>
-            <a:srgbClr val="D4E3F7"/>
+            <a:srgbClr val="26231F"/>
+          </a:solidFill>
+          <a:ln>
+            <a:noFill/>
+          </a:ln>
+        </p:spPr>
+        <p:txBody>
+          <a:bodyPr rtlCol="0" anchor="ctr"/>
+          <a:lstStyle/>
+          <a:p>
+            <a:pPr algn="ctr"/>
+          </a:p>
+        </p:txBody>
+      </p:sp>
+      <p:sp>
+        <p:nvSpPr>
+          <p:cNvPr id="4" name="상단 라벨"/>
+          <p:cNvSpPr txBox="1"/>
+          <p:nvPr/>
+        </p:nvSpPr>
+        <p:spPr>
+          <a:xfrm>
+            <a:off x="640080" y="237744"/>
+            <a:ext cx="5486400" cy="274320"/>
+          </a:xfrm>
+          <a:prstGeom prst="rect">
+            <a:avLst/>
+          </a:prstGeom>
+          <a:noFill/>
+        </p:spPr>
+        <p:txBody>
+          <a:bodyPr wrap="square" lIns="54864" rIns="54864" tIns="27432" bIns="27432" anchor="ctr">
+            <a:noAutofit/>
+          </a:bodyPr>
+          <a:lstStyle/>
+          <a:p>
+            <a:pPr algn="l">
+              <a:lnSpc>
+                <a:spcPct val="115000"/>
+              </a:lnSpc>
+            </a:pPr>
+            <a:r>
+              <a:rPr sz="900" b="1" i="0" spc="250">
+                <a:solidFill>
+                  <a:srgbClr val="26231F"/>
+                </a:solidFill>
+              </a:rPr>
+              <a:t>FAMILY ALBUM</a:t>
+            </a:r>
+          </a:p>
+        </p:txBody>
+      </p:sp>
+      <p:sp>
+        <p:nvSpPr>
+          <p:cNvPr id="5" name="포인트"/>
+          <p:cNvSpPr/>
+          <p:nvPr/>
+        </p:nvSpPr>
+        <p:spPr>
+          <a:xfrm>
+            <a:off x="11204143" y="246888"/>
+            <a:ext cx="237744" cy="237744"/>
+          </a:xfrm>
+          <a:prstGeom prst="donut">
+            <a:avLst/>
+          </a:prstGeom>
+          <a:solidFill>
+            <a:srgbClr val="97BBED"/>
           </a:solidFill>
           <a:ln>
             <a:noFill/>
@@ -4509,8 +4722,8 @@
         </p:nvSpPr>
         <p:spPr>
           <a:xfrm>
-            <a:off x="640080" y="457200"/>
-            <a:ext cx="9722815" cy="868680"/>
+            <a:off x="640080" y="731520"/>
+            <a:ext cx="10911535" cy="822960"/>
           </a:xfrm>
         </p:spPr>
         <p:txBody>
@@ -4527,7 +4740,7 @@
             <a:r>
               <a:rPr sz="3000" b="1" i="0">
                 <a:solidFill>
-                  <a:srgbClr val="1D4072"/>
+                  <a:srgbClr val="26231F"/>
                 </a:solidFill>
               </a:rPr>
               <a:t>우리 가족 이야기</a:t>
@@ -4537,20 +4750,20 @@
       </p:sp>
       <p:sp>
         <p:nvSpPr>
-          <p:cNvPr id="4" name="타임라인 선"/>
+          <p:cNvPr id="6" name="타임라인 선"/>
           <p:cNvSpPr/>
           <p:nvPr/>
         </p:nvSpPr>
         <p:spPr>
           <a:xfrm>
-            <a:off x="640080" y="3337560"/>
+            <a:off x="640080" y="3520440"/>
             <a:ext cx="10911535" cy="54864"/>
           </a:xfrm>
           <a:prstGeom prst="rect">
             <a:avLst/>
           </a:prstGeom>
           <a:solidFill>
-            <a:srgbClr val="D4E3F7"/>
+            <a:srgbClr val="D1E2FA"/>
           </a:solidFill>
           <a:ln>
             <a:noFill/>
@@ -4566,20 +4779,20 @@
       </p:sp>
       <p:sp>
         <p:nvSpPr>
-          <p:cNvPr id="5" name="때 1"/>
+          <p:cNvPr id="7" name="때 1"/>
           <p:cNvSpPr/>
           <p:nvPr/>
         </p:nvSpPr>
         <p:spPr>
           <a:xfrm>
-            <a:off x="1802853" y="3154680"/>
+            <a:off x="1802853" y="3337560"/>
             <a:ext cx="402336" cy="402336"/>
           </a:xfrm>
           <a:prstGeom prst="ellipse">
             <a:avLst/>
           </a:prstGeom>
           <a:solidFill>
-            <a:srgbClr val="4981D0"/>
+            <a:srgbClr val="97BBED"/>
           </a:solidFill>
           <a:ln w="38100">
             <a:solidFill>
@@ -4597,13 +4810,13 @@
       </p:sp>
       <p:sp>
         <p:nvSpPr>
-          <p:cNvPr id="6" name="TextBox 5"/>
+          <p:cNvPr id="8" name="TextBox 7"/>
           <p:cNvSpPr txBox="1"/>
           <p:nvPr/>
         </p:nvSpPr>
         <p:spPr>
           <a:xfrm>
-            <a:off x="685800" y="2514600"/>
+            <a:off x="685800" y="2697480"/>
             <a:ext cx="2636443" cy="457200"/>
           </a:xfrm>
           <a:prstGeom prst="rect">
@@ -4625,7 +4838,7 @@
             <a:r>
               <a:rPr sz="1600" b="1" i="0">
                 <a:solidFill>
-                  <a:srgbClr val="4981D0"/>
+                  <a:srgbClr val="97BBED"/>
                 </a:solidFill>
               </a:rPr>
               <a:t>할아버지 할머니의 이야기</a:t>
@@ -4635,13 +4848,13 @@
       </p:sp>
       <p:sp>
         <p:nvSpPr>
-          <p:cNvPr id="7" name="TextBox 6"/>
+          <p:cNvPr id="9" name="TextBox 8"/>
           <p:cNvSpPr txBox="1"/>
           <p:nvPr/>
         </p:nvSpPr>
         <p:spPr>
           <a:xfrm>
-            <a:off x="731519" y="3703320"/>
+            <a:off x="731519" y="3886200"/>
             <a:ext cx="2545003" cy="457200"/>
           </a:xfrm>
           <a:prstGeom prst="rect">
@@ -4663,7 +4876,7 @@
             <a:r>
               <a:rPr sz="1800" b="1" i="0">
                 <a:solidFill>
-                  <a:srgbClr val="1D4072"/>
+                  <a:srgbClr val="273549"/>
                 </a:solidFill>
               </a:rPr>
               <a:t>뿌리</a:t>
@@ -4673,13 +4886,13 @@
       </p:sp>
       <p:sp>
         <p:nvSpPr>
-          <p:cNvPr id="8" name="TextBox 7"/>
+          <p:cNvPr id="10" name="TextBox 9"/>
           <p:cNvSpPr txBox="1"/>
           <p:nvPr/>
         </p:nvSpPr>
         <p:spPr>
           <a:xfrm>
-            <a:off x="731519" y="4206240"/>
+            <a:off x="731519" y="4389120"/>
             <a:ext cx="2545003" cy="1645920"/>
           </a:xfrm>
           <a:prstGeom prst="rect">
@@ -4701,7 +4914,7 @@
             <a:r>
               <a:rPr sz="1500" b="0" i="0">
                 <a:solidFill>
-                  <a:srgbClr val="2B2B2B"/>
+                  <a:srgbClr val="26231F"/>
                 </a:solidFill>
               </a:rPr>
               <a:t>가족의 시작을 적어요</a:t>
@@ -4711,20 +4924,20 @@
       </p:sp>
       <p:sp>
         <p:nvSpPr>
-          <p:cNvPr id="9" name="때 2"/>
+          <p:cNvPr id="11" name="때 2"/>
           <p:cNvSpPr/>
           <p:nvPr/>
         </p:nvSpPr>
         <p:spPr>
           <a:xfrm>
-            <a:off x="4530737" y="3154680"/>
+            <a:off x="4530737" y="3337560"/>
             <a:ext cx="402336" cy="402336"/>
           </a:xfrm>
           <a:prstGeom prst="ellipse">
             <a:avLst/>
           </a:prstGeom>
           <a:solidFill>
-            <a:srgbClr val="4981D0"/>
+            <a:srgbClr val="97BBED"/>
           </a:solidFill>
           <a:ln w="38100">
             <a:solidFill>
@@ -4742,13 +4955,13 @@
       </p:sp>
       <p:sp>
         <p:nvSpPr>
-          <p:cNvPr id="10" name="TextBox 9"/>
+          <p:cNvPr id="12" name="TextBox 11"/>
           <p:cNvSpPr txBox="1"/>
           <p:nvPr/>
         </p:nvSpPr>
         <p:spPr>
           <a:xfrm>
-            <a:off x="3413683" y="2514600"/>
+            <a:off x="3413683" y="2697480"/>
             <a:ext cx="2636443" cy="457200"/>
           </a:xfrm>
           <a:prstGeom prst="rect">
@@ -4770,7 +4983,7 @@
             <a:r>
               <a:rPr sz="1600" b="1" i="0">
                 <a:solidFill>
-                  <a:srgbClr val="4981D0"/>
+                  <a:srgbClr val="97BBED"/>
                 </a:solidFill>
               </a:rPr>
               <a:t>부모가 된 날</a:t>
@@ -4780,13 +4993,13 @@
       </p:sp>
       <p:sp>
         <p:nvSpPr>
-          <p:cNvPr id="11" name="TextBox 10"/>
+          <p:cNvPr id="13" name="TextBox 12"/>
           <p:cNvSpPr txBox="1"/>
           <p:nvPr/>
         </p:nvSpPr>
         <p:spPr>
           <a:xfrm>
-            <a:off x="3459403" y="3703320"/>
+            <a:off x="3459403" y="3886200"/>
             <a:ext cx="2545003" cy="457200"/>
           </a:xfrm>
           <a:prstGeom prst="rect">
@@ -4808,7 +5021,7 @@
             <a:r>
               <a:rPr sz="1800" b="1" i="0">
                 <a:solidFill>
-                  <a:srgbClr val="1D4072"/>
+                  <a:srgbClr val="273549"/>
                 </a:solidFill>
               </a:rPr>
               <a:t>새로운 가지</a:t>
@@ -4818,13 +5031,13 @@
       </p:sp>
       <p:sp>
         <p:nvSpPr>
-          <p:cNvPr id="12" name="TextBox 11"/>
+          <p:cNvPr id="14" name="TextBox 13"/>
           <p:cNvSpPr txBox="1"/>
           <p:nvPr/>
         </p:nvSpPr>
         <p:spPr>
           <a:xfrm>
-            <a:off x="3459403" y="4206240"/>
+            <a:off x="3459403" y="4389120"/>
             <a:ext cx="2545003" cy="1645920"/>
           </a:xfrm>
           <a:prstGeom prst="rect">
@@ -4846,7 +5059,7 @@
             <a:r>
               <a:rPr sz="1500" b="0" i="0">
                 <a:solidFill>
-                  <a:srgbClr val="2B2B2B"/>
+                  <a:srgbClr val="26231F"/>
                 </a:solidFill>
               </a:rPr>
               <a:t>그날의 기억을 적어요</a:t>
@@ -4856,20 +5069,20 @@
       </p:sp>
       <p:sp>
         <p:nvSpPr>
-          <p:cNvPr id="13" name="때 3"/>
+          <p:cNvPr id="15" name="때 3"/>
           <p:cNvSpPr/>
           <p:nvPr/>
         </p:nvSpPr>
         <p:spPr>
           <a:xfrm>
-            <a:off x="7258621" y="3154680"/>
+            <a:off x="7258621" y="3337560"/>
             <a:ext cx="402336" cy="402336"/>
           </a:xfrm>
           <a:prstGeom prst="ellipse">
             <a:avLst/>
           </a:prstGeom>
           <a:solidFill>
-            <a:srgbClr val="4981D0"/>
+            <a:srgbClr val="97BBED"/>
           </a:solidFill>
           <a:ln w="38100">
             <a:solidFill>
@@ -4887,13 +5100,13 @@
       </p:sp>
       <p:sp>
         <p:nvSpPr>
-          <p:cNvPr id="14" name="TextBox 13"/>
+          <p:cNvPr id="16" name="TextBox 15"/>
           <p:cNvSpPr txBox="1"/>
           <p:nvPr/>
         </p:nvSpPr>
         <p:spPr>
           <a:xfrm>
-            <a:off x="6141567" y="2514600"/>
+            <a:off x="6141567" y="2697480"/>
             <a:ext cx="2636443" cy="457200"/>
           </a:xfrm>
           <a:prstGeom prst="rect">
@@ -4915,7 +5128,7 @@
             <a:r>
               <a:rPr sz="1600" b="1" i="0">
                 <a:solidFill>
-                  <a:srgbClr val="4981D0"/>
+                  <a:srgbClr val="97BBED"/>
                 </a:solidFill>
               </a:rPr>
               <a:t>온 가족 모임</a:t>
@@ -4925,13 +5138,13 @@
       </p:sp>
       <p:sp>
         <p:nvSpPr>
-          <p:cNvPr id="15" name="TextBox 14"/>
+          <p:cNvPr id="17" name="TextBox 16"/>
           <p:cNvSpPr txBox="1"/>
           <p:nvPr/>
         </p:nvSpPr>
         <p:spPr>
           <a:xfrm>
-            <a:off x="6187287" y="3703320"/>
+            <a:off x="6187287" y="3886200"/>
             <a:ext cx="2545003" cy="457200"/>
           </a:xfrm>
           <a:prstGeom prst="rect">
@@ -4953,7 +5166,7 @@
             <a:r>
               <a:rPr sz="1800" b="1" i="0">
                 <a:solidFill>
-                  <a:srgbClr val="1D4072"/>
+                  <a:srgbClr val="273549"/>
                 </a:solidFill>
               </a:rPr>
               <a:t>한자리에 모인 날</a:t>
@@ -4963,13 +5176,13 @@
       </p:sp>
       <p:sp>
         <p:nvSpPr>
-          <p:cNvPr id="16" name="TextBox 15"/>
+          <p:cNvPr id="18" name="TextBox 17"/>
           <p:cNvSpPr txBox="1"/>
           <p:nvPr/>
         </p:nvSpPr>
         <p:spPr>
           <a:xfrm>
-            <a:off x="6187287" y="4206240"/>
+            <a:off x="6187287" y="4389120"/>
             <a:ext cx="2545003" cy="1645920"/>
           </a:xfrm>
           <a:prstGeom prst="rect">
@@ -4991,7 +5204,7 @@
             <a:r>
               <a:rPr sz="1500" b="0" i="0">
                 <a:solidFill>
-                  <a:srgbClr val="2B2B2B"/>
+                  <a:srgbClr val="26231F"/>
                 </a:solidFill>
               </a:rPr>
               <a:t>가장 즐거웠던 명절</a:t>
@@ -5001,20 +5214,20 @@
       </p:sp>
       <p:sp>
         <p:nvSpPr>
-          <p:cNvPr id="17" name="때 4"/>
+          <p:cNvPr id="19" name="때 4"/>
           <p:cNvSpPr/>
           <p:nvPr/>
         </p:nvSpPr>
         <p:spPr>
           <a:xfrm>
-            <a:off x="9986505" y="3154680"/>
+            <a:off x="9986505" y="3337560"/>
             <a:ext cx="402336" cy="402336"/>
           </a:xfrm>
           <a:prstGeom prst="ellipse">
             <a:avLst/>
           </a:prstGeom>
           <a:solidFill>
-            <a:srgbClr val="4981D0"/>
+            <a:srgbClr val="97BBED"/>
           </a:solidFill>
           <a:ln w="38100">
             <a:solidFill>
@@ -5032,13 +5245,13 @@
       </p:sp>
       <p:sp>
         <p:nvSpPr>
-          <p:cNvPr id="18" name="TextBox 17"/>
+          <p:cNvPr id="20" name="TextBox 19"/>
           <p:cNvSpPr txBox="1"/>
           <p:nvPr/>
         </p:nvSpPr>
         <p:spPr>
           <a:xfrm>
-            <a:off x="8869451" y="2514600"/>
+            <a:off x="8869451" y="2697480"/>
             <a:ext cx="2636443" cy="457200"/>
           </a:xfrm>
           <a:prstGeom prst="rect">
@@ -5060,7 +5273,7 @@
             <a:r>
               <a:rPr sz="1600" b="1" i="0">
                 <a:solidFill>
-                  <a:srgbClr val="4981D0"/>
+                  <a:srgbClr val="97BBED"/>
                 </a:solidFill>
               </a:rPr>
               <a:t>지금</a:t>
@@ -5070,13 +5283,13 @@
       </p:sp>
       <p:sp>
         <p:nvSpPr>
-          <p:cNvPr id="19" name="TextBox 18"/>
+          <p:cNvPr id="21" name="TextBox 20"/>
           <p:cNvSpPr txBox="1"/>
           <p:nvPr/>
         </p:nvSpPr>
         <p:spPr>
           <a:xfrm>
-            <a:off x="8915171" y="3703320"/>
+            <a:off x="8915171" y="3886200"/>
             <a:ext cx="2545003" cy="457200"/>
           </a:xfrm>
           <a:prstGeom prst="rect">
@@ -5098,7 +5311,7 @@
             <a:r>
               <a:rPr sz="1800" b="1" i="0">
                 <a:solidFill>
-                  <a:srgbClr val="1D4072"/>
+                  <a:srgbClr val="273549"/>
                 </a:solidFill>
               </a:rPr>
               <a:t>오늘의 우리</a:t>
@@ -5108,13 +5321,13 @@
       </p:sp>
       <p:sp>
         <p:nvSpPr>
-          <p:cNvPr id="20" name="TextBox 19"/>
+          <p:cNvPr id="22" name="TextBox 21"/>
           <p:cNvSpPr txBox="1"/>
           <p:nvPr/>
         </p:nvSpPr>
         <p:spPr>
           <a:xfrm>
-            <a:off x="8915171" y="4206240"/>
+            <a:off x="8915171" y="4389120"/>
             <a:ext cx="2545003" cy="1645920"/>
           </a:xfrm>
           <a:prstGeom prst="rect">
@@ -5136,7 +5349,7 @@
             <a:r>
               <a:rPr sz="1500" b="0" i="0">
                 <a:solidFill>
-                  <a:srgbClr val="2B2B2B"/>
+                  <a:srgbClr val="26231F"/>
                 </a:solidFill>
               </a:rPr>
               <a:t>요즘 우리 이야기</a:t>
@@ -5158,7 +5371,7 @@
     <p:bg>
       <p:bgPr>
         <a:solidFill>
-          <a:srgbClr val="F3F7FC"/>
+          <a:srgbClr val="FAFBFD"/>
         </a:solidFill>
         <a:effectLst/>
       </p:bgPr>
@@ -5177,18 +5390,82 @@
           <p:nvPr/>
         </p:nvSpPr>
         <p:spPr>
-          <a:xfrm rot="10800000">
-            <a:off x="10637215" y="0"/>
-            <a:ext cx="914400" cy="1554480"/>
-          </a:xfrm>
-          <a:prstGeom prst="round2SameRect">
-            <a:avLst>
-              <a:gd name="adj1" fmla="val 50000"/>
-              <a:gd name="adj2" fmla="val 0"/>
-            </a:avLst>
+          <a:xfrm>
+            <a:off x="640080" y="566928"/>
+            <a:ext cx="10911535" cy="10972"/>
+          </a:xfrm>
+          <a:prstGeom prst="rect">
+            <a:avLst/>
           </a:prstGeom>
           <a:solidFill>
-            <a:srgbClr val="D4E3F7"/>
+            <a:srgbClr val="26231F"/>
+          </a:solidFill>
+          <a:ln>
+            <a:noFill/>
+          </a:ln>
+        </p:spPr>
+        <p:txBody>
+          <a:bodyPr rtlCol="0" anchor="ctr"/>
+          <a:lstStyle/>
+          <a:p>
+            <a:pPr algn="ctr"/>
+          </a:p>
+        </p:txBody>
+      </p:sp>
+      <p:sp>
+        <p:nvSpPr>
+          <p:cNvPr id="4" name="상단 라벨"/>
+          <p:cNvSpPr txBox="1"/>
+          <p:nvPr/>
+        </p:nvSpPr>
+        <p:spPr>
+          <a:xfrm>
+            <a:off x="640080" y="237744"/>
+            <a:ext cx="5486400" cy="274320"/>
+          </a:xfrm>
+          <a:prstGeom prst="rect">
+            <a:avLst/>
+          </a:prstGeom>
+          <a:noFill/>
+        </p:spPr>
+        <p:txBody>
+          <a:bodyPr wrap="square" lIns="54864" rIns="54864" tIns="27432" bIns="27432" anchor="ctr">
+            <a:noAutofit/>
+          </a:bodyPr>
+          <a:lstStyle/>
+          <a:p>
+            <a:pPr algn="l">
+              <a:lnSpc>
+                <a:spcPct val="115000"/>
+              </a:lnSpc>
+            </a:pPr>
+            <a:r>
+              <a:rPr sz="900" b="1" i="0" spc="250">
+                <a:solidFill>
+                  <a:srgbClr val="26231F"/>
+                </a:solidFill>
+              </a:rPr>
+              <a:t>FAMILY ALBUM</a:t>
+            </a:r>
+          </a:p>
+        </p:txBody>
+      </p:sp>
+      <p:sp>
+        <p:nvSpPr>
+          <p:cNvPr id="5" name="포인트"/>
+          <p:cNvSpPr/>
+          <p:nvPr/>
+        </p:nvSpPr>
+        <p:spPr>
+          <a:xfrm>
+            <a:off x="11204143" y="246888"/>
+            <a:ext cx="237744" cy="237744"/>
+          </a:xfrm>
+          <a:prstGeom prst="donut">
+            <a:avLst/>
+          </a:prstGeom>
+          <a:solidFill>
+            <a:srgbClr val="97BBED"/>
           </a:solidFill>
           <a:ln>
             <a:noFill/>
@@ -5214,8 +5491,8 @@
         </p:nvSpPr>
         <p:spPr>
           <a:xfrm>
-            <a:off x="640080" y="457200"/>
-            <a:ext cx="9722815" cy="868680"/>
+            <a:off x="640080" y="731520"/>
+            <a:ext cx="10911535" cy="822960"/>
           </a:xfrm>
         </p:spPr>
         <p:txBody>
@@ -5232,7 +5509,7 @@
             <a:r>
               <a:rPr sz="3000" b="1" i="0">
                 <a:solidFill>
-                  <a:srgbClr val="1D4072"/>
+                  <a:srgbClr val="26231F"/>
                 </a:solidFill>
               </a:rPr>
               <a:t>우리 가족의 약속</a:t>
@@ -5242,205 +5519,51 @@
       </p:sp>
       <p:sp>
         <p:nvSpPr>
-          <p:cNvPr id="4" name="줄 1"/>
+          <p:cNvPr id="6" name="줄 1"/>
           <p:cNvSpPr/>
           <p:nvPr/>
         </p:nvSpPr>
         <p:spPr>
           <a:xfrm>
-            <a:off x="640080" y="1600200"/>
+            <a:off x="640080" y="1783080"/>
             <a:ext cx="10911535" cy="1005840"/>
           </a:xfrm>
           <a:prstGeom prst="roundRect">
             <a:avLst>
-              <a:gd name="adj" fmla="val 8000"/>
+              <a:gd name="adj" fmla="val 7000"/>
             </a:avLst>
           </a:prstGeom>
           <a:solidFill>
-            <a:srgbClr val="F3F7FC"/>
-          </a:solidFill>
-          <a:ln w="12700">
-            <a:solidFill>
-              <a:srgbClr val="D4E3F7"/>
-            </a:solidFill>
-          </a:ln>
-        </p:spPr>
-        <p:txBody>
-          <a:bodyPr rtlCol="0" anchor="ctr"/>
-          <a:lstStyle/>
-          <a:p>
-            <a:pPr algn="ctr"/>
-          </a:p>
-        </p:txBody>
-      </p:sp>
-      <p:sp>
-        <p:nvSpPr>
-          <p:cNvPr id="5" name="번호 1"/>
-          <p:cNvSpPr/>
-          <p:nvPr/>
-        </p:nvSpPr>
-        <p:spPr>
-          <a:xfrm>
-            <a:off x="822959" y="1874519"/>
-            <a:ext cx="457200" cy="457200"/>
-          </a:xfrm>
-          <a:prstGeom prst="ellipse">
-            <a:avLst/>
-          </a:prstGeom>
-          <a:solidFill>
-            <a:srgbClr val="4981D0"/>
+            <a:srgbClr val="EAF2FD"/>
           </a:solidFill>
           <a:ln>
             <a:noFill/>
           </a:ln>
         </p:spPr>
         <p:txBody>
-          <a:bodyPr rtlCol="0" anchor="ctr" wrap="square" lIns="54864" rIns="54864" tIns="27432" bIns="27432">
-            <a:noAutofit/>
-          </a:bodyPr>
-          <a:lstStyle/>
-          <a:p>
-            <a:pPr algn="ctr">
-              <a:lnSpc>
-                <a:spcPct val="100000"/>
-              </a:lnSpc>
-            </a:pPr>
-            <a:r>
-              <a:rPr sz="1600" b="1" i="0">
-                <a:solidFill>
-                  <a:srgbClr val="FFFFFF"/>
-                </a:solidFill>
-              </a:rPr>
-              <a:t>1</a:t>
-            </a:r>
-          </a:p>
-        </p:txBody>
-      </p:sp>
-      <p:sp>
-        <p:nvSpPr>
-          <p:cNvPr id="6" name="TextBox 5"/>
-          <p:cNvSpPr txBox="1"/>
-          <p:nvPr/>
-        </p:nvSpPr>
-        <p:spPr>
-          <a:xfrm>
-            <a:off x="1508760" y="1645920"/>
-            <a:ext cx="2743200" cy="914400"/>
-          </a:xfrm>
-          <a:prstGeom prst="rect">
-            <a:avLst/>
-          </a:prstGeom>
-          <a:noFill/>
-        </p:spPr>
-        <p:txBody>
-          <a:bodyPr wrap="square" lIns="54864" rIns="54864" tIns="27432" bIns="27432" anchor="ctr">
-            <a:noAutofit/>
-          </a:bodyPr>
-          <a:lstStyle/>
-          <a:p>
-            <a:pPr algn="l">
-              <a:lnSpc>
-                <a:spcPct val="115000"/>
-              </a:lnSpc>
-            </a:pPr>
-            <a:r>
-              <a:rPr sz="1800" b="1" i="0">
-                <a:solidFill>
-                  <a:srgbClr val="1D4072"/>
-                </a:solidFill>
-              </a:rPr>
-              <a:t>약속 1</a:t>
-            </a:r>
-          </a:p>
-        </p:txBody>
-      </p:sp>
-      <p:sp>
-        <p:nvSpPr>
-          <p:cNvPr id="7" name="TextBox 6"/>
-          <p:cNvSpPr txBox="1"/>
-          <p:nvPr/>
-        </p:nvSpPr>
-        <p:spPr>
-          <a:xfrm>
-            <a:off x="4297680" y="1645920"/>
-            <a:ext cx="7071055" cy="914400"/>
-          </a:xfrm>
-          <a:prstGeom prst="rect">
-            <a:avLst/>
-          </a:prstGeom>
-          <a:noFill/>
-        </p:spPr>
-        <p:txBody>
-          <a:bodyPr wrap="square" lIns="54864" rIns="54864" tIns="27432" bIns="27432" anchor="ctr">
-            <a:noAutofit/>
-          </a:bodyPr>
-          <a:lstStyle/>
-          <a:p>
-            <a:pPr algn="l">
-              <a:lnSpc>
-                <a:spcPct val="115000"/>
-              </a:lnSpc>
-            </a:pPr>
-            <a:r>
-              <a:rPr sz="1700" b="0" i="0">
-                <a:solidFill>
-                  <a:srgbClr val="2B2B2B"/>
-                </a:solidFill>
-              </a:rPr>
-              <a:t>명절에는 모두 한자리에 모이기</a:t>
-            </a:r>
-          </a:p>
-        </p:txBody>
-      </p:sp>
-      <p:sp>
-        <p:nvSpPr>
-          <p:cNvPr id="8" name="줄 2"/>
+          <a:bodyPr rtlCol="0" anchor="ctr"/>
+          <a:lstStyle/>
+          <a:p>
+            <a:pPr algn="ctr"/>
+          </a:p>
+        </p:txBody>
+      </p:sp>
+      <p:sp>
+        <p:nvSpPr>
+          <p:cNvPr id="7" name="번호 1"/>
           <p:cNvSpPr/>
           <p:nvPr/>
         </p:nvSpPr>
         <p:spPr>
           <a:xfrm>
-            <a:off x="640080" y="2743200"/>
-            <a:ext cx="10911535" cy="1005840"/>
-          </a:xfrm>
-          <a:prstGeom prst="roundRect">
-            <a:avLst>
-              <a:gd name="adj" fmla="val 8000"/>
-            </a:avLst>
-          </a:prstGeom>
-          <a:solidFill>
-            <a:srgbClr val="F3F7FC"/>
-          </a:solidFill>
-          <a:ln w="12700">
-            <a:solidFill>
-              <a:srgbClr val="D4E3F7"/>
-            </a:solidFill>
-          </a:ln>
-        </p:spPr>
-        <p:txBody>
-          <a:bodyPr rtlCol="0" anchor="ctr"/>
-          <a:lstStyle/>
-          <a:p>
-            <a:pPr algn="ctr"/>
-          </a:p>
-        </p:txBody>
-      </p:sp>
-      <p:sp>
-        <p:nvSpPr>
-          <p:cNvPr id="9" name="번호 2"/>
-          <p:cNvSpPr/>
-          <p:nvPr/>
-        </p:nvSpPr>
-        <p:spPr>
-          <a:xfrm>
-            <a:off x="822959" y="3017520"/>
+            <a:off x="822959" y="2057400"/>
             <a:ext cx="457200" cy="457200"/>
           </a:xfrm>
           <a:prstGeom prst="ellipse">
             <a:avLst/>
           </a:prstGeom>
           <a:solidFill>
-            <a:srgbClr val="4981D0"/>
+            <a:srgbClr val="97BBED"/>
           </a:solidFill>
           <a:ln>
             <a:noFill/>
@@ -5460,23 +5583,23 @@
             <a:r>
               <a:rPr sz="1600" b="1" i="0">
                 <a:solidFill>
-                  <a:srgbClr val="FFFFFF"/>
-                </a:solidFill>
-              </a:rPr>
-              <a:t>2</a:t>
-            </a:r>
-          </a:p>
-        </p:txBody>
-      </p:sp>
-      <p:sp>
-        <p:nvSpPr>
-          <p:cNvPr id="10" name="TextBox 9"/>
+                  <a:srgbClr val="26231F"/>
+                </a:solidFill>
+              </a:rPr>
+              <a:t>1</a:t>
+            </a:r>
+          </a:p>
+        </p:txBody>
+      </p:sp>
+      <p:sp>
+        <p:nvSpPr>
+          <p:cNvPr id="8" name="TextBox 7"/>
           <p:cNvSpPr txBox="1"/>
           <p:nvPr/>
         </p:nvSpPr>
         <p:spPr>
           <a:xfrm>
-            <a:off x="1508760" y="2788920"/>
+            <a:off x="1508760" y="1828800"/>
             <a:ext cx="2743200" cy="914400"/>
           </a:xfrm>
           <a:prstGeom prst="rect">
@@ -5498,23 +5621,23 @@
             <a:r>
               <a:rPr sz="1800" b="1" i="0">
                 <a:solidFill>
-                  <a:srgbClr val="1D4072"/>
-                </a:solidFill>
-              </a:rPr>
-              <a:t>약속 2</a:t>
-            </a:r>
-          </a:p>
-        </p:txBody>
-      </p:sp>
-      <p:sp>
-        <p:nvSpPr>
-          <p:cNvPr id="11" name="TextBox 10"/>
+                  <a:srgbClr val="273549"/>
+                </a:solidFill>
+              </a:rPr>
+              <a:t>약속 1</a:t>
+            </a:r>
+          </a:p>
+        </p:txBody>
+      </p:sp>
+      <p:sp>
+        <p:nvSpPr>
+          <p:cNvPr id="9" name="TextBox 8"/>
           <p:cNvSpPr txBox="1"/>
           <p:nvPr/>
         </p:nvSpPr>
         <p:spPr>
           <a:xfrm>
-            <a:off x="4297680" y="2788920"/>
+            <a:off x="4297680" y="1828800"/>
             <a:ext cx="7071055" cy="914400"/>
           </a:xfrm>
           <a:prstGeom prst="rect">
@@ -5536,69 +5659,67 @@
             <a:r>
               <a:rPr sz="1700" b="0" i="0">
                 <a:solidFill>
-                  <a:srgbClr val="2B2B2B"/>
-                </a:solidFill>
-              </a:rPr>
-              <a:t>어른께 먼저 안부 전하기</a:t>
-            </a:r>
-          </a:p>
-        </p:txBody>
-      </p:sp>
-      <p:sp>
-        <p:nvSpPr>
-          <p:cNvPr id="12" name="줄 3"/>
+                  <a:srgbClr val="26231F"/>
+                </a:solidFill>
+              </a:rPr>
+              <a:t>명절에는 모두 한자리에 모이기</a:t>
+            </a:r>
+          </a:p>
+        </p:txBody>
+      </p:sp>
+      <p:sp>
+        <p:nvSpPr>
+          <p:cNvPr id="10" name="줄 2"/>
           <p:cNvSpPr/>
           <p:nvPr/>
         </p:nvSpPr>
         <p:spPr>
           <a:xfrm>
-            <a:off x="640080" y="3886200"/>
+            <a:off x="640080" y="2926080"/>
             <a:ext cx="10911535" cy="1005840"/>
           </a:xfrm>
           <a:prstGeom prst="roundRect">
             <a:avLst>
-              <a:gd name="adj" fmla="val 8000"/>
+              <a:gd name="adj" fmla="val 7000"/>
             </a:avLst>
           </a:prstGeom>
           <a:solidFill>
-            <a:srgbClr val="F3F7FC"/>
-          </a:solidFill>
-          <a:ln w="12700">
-            <a:solidFill>
-              <a:srgbClr val="D4E3F7"/>
-            </a:solidFill>
-          </a:ln>
-        </p:spPr>
-        <p:txBody>
-          <a:bodyPr rtlCol="0" anchor="ctr"/>
-          <a:lstStyle/>
-          <a:p>
-            <a:pPr algn="ctr"/>
-          </a:p>
-        </p:txBody>
-      </p:sp>
-      <p:sp>
-        <p:nvSpPr>
-          <p:cNvPr id="13" name="번호 3"/>
-          <p:cNvSpPr/>
-          <p:nvPr/>
-        </p:nvSpPr>
-        <p:spPr>
-          <a:xfrm>
-            <a:off x="822959" y="4160520"/>
-            <a:ext cx="457200" cy="457200"/>
-          </a:xfrm>
-          <a:prstGeom prst="ellipse">
-            <a:avLst/>
-          </a:prstGeom>
-          <a:solidFill>
-            <a:srgbClr val="4981D0"/>
+            <a:srgbClr val="EAF2FD"/>
           </a:solidFill>
           <a:ln>
             <a:noFill/>
           </a:ln>
         </p:spPr>
         <p:txBody>
+          <a:bodyPr rtlCol="0" anchor="ctr"/>
+          <a:lstStyle/>
+          <a:p>
+            <a:pPr algn="ctr"/>
+          </a:p>
+        </p:txBody>
+      </p:sp>
+      <p:sp>
+        <p:nvSpPr>
+          <p:cNvPr id="11" name="번호 2"/>
+          <p:cNvSpPr/>
+          <p:nvPr/>
+        </p:nvSpPr>
+        <p:spPr>
+          <a:xfrm>
+            <a:off x="822959" y="3200400"/>
+            <a:ext cx="457200" cy="457200"/>
+          </a:xfrm>
+          <a:prstGeom prst="ellipse">
+            <a:avLst/>
+          </a:prstGeom>
+          <a:solidFill>
+            <a:srgbClr val="97BBED"/>
+          </a:solidFill>
+          <a:ln>
+            <a:noFill/>
+          </a:ln>
+        </p:spPr>
+        <p:txBody>
           <a:bodyPr rtlCol="0" anchor="ctr" wrap="square" lIns="54864" rIns="54864" tIns="27432" bIns="27432">
             <a:noAutofit/>
           </a:bodyPr>
@@ -5612,23 +5733,23 @@
             <a:r>
               <a:rPr sz="1600" b="1" i="0">
                 <a:solidFill>
-                  <a:srgbClr val="FFFFFF"/>
-                </a:solidFill>
-              </a:rPr>
-              <a:t>3</a:t>
-            </a:r>
-          </a:p>
-        </p:txBody>
-      </p:sp>
-      <p:sp>
-        <p:nvSpPr>
-          <p:cNvPr id="14" name="TextBox 13"/>
+                  <a:srgbClr val="26231F"/>
+                </a:solidFill>
+              </a:rPr>
+              <a:t>2</a:t>
+            </a:r>
+          </a:p>
+        </p:txBody>
+      </p:sp>
+      <p:sp>
+        <p:nvSpPr>
+          <p:cNvPr id="12" name="TextBox 11"/>
           <p:cNvSpPr txBox="1"/>
           <p:nvPr/>
         </p:nvSpPr>
         <p:spPr>
           <a:xfrm>
-            <a:off x="1508760" y="3931920"/>
+            <a:off x="1508760" y="2971800"/>
             <a:ext cx="2743200" cy="914400"/>
           </a:xfrm>
           <a:prstGeom prst="rect">
@@ -5650,23 +5771,23 @@
             <a:r>
               <a:rPr sz="1800" b="1" i="0">
                 <a:solidFill>
-                  <a:srgbClr val="1D4072"/>
-                </a:solidFill>
-              </a:rPr>
-              <a:t>약속 3</a:t>
-            </a:r>
-          </a:p>
-        </p:txBody>
-      </p:sp>
-      <p:sp>
-        <p:nvSpPr>
-          <p:cNvPr id="15" name="TextBox 14"/>
+                  <a:srgbClr val="273549"/>
+                </a:solidFill>
+              </a:rPr>
+              <a:t>약속 2</a:t>
+            </a:r>
+          </a:p>
+        </p:txBody>
+      </p:sp>
+      <p:sp>
+        <p:nvSpPr>
+          <p:cNvPr id="13" name="TextBox 12"/>
           <p:cNvSpPr txBox="1"/>
           <p:nvPr/>
         </p:nvSpPr>
         <p:spPr>
           <a:xfrm>
-            <a:off x="4297680" y="3931920"/>
+            <a:off x="4297680" y="2971800"/>
             <a:ext cx="7071055" cy="914400"/>
           </a:xfrm>
           <a:prstGeom prst="rect">
@@ -5688,7 +5809,157 @@
             <a:r>
               <a:rPr sz="1700" b="0" i="0">
                 <a:solidFill>
-                  <a:srgbClr val="2B2B2B"/>
+                  <a:srgbClr val="26231F"/>
+                </a:solidFill>
+              </a:rPr>
+              <a:t>어른께 먼저 안부 전하기</a:t>
+            </a:r>
+          </a:p>
+        </p:txBody>
+      </p:sp>
+      <p:sp>
+        <p:nvSpPr>
+          <p:cNvPr id="14" name="줄 3"/>
+          <p:cNvSpPr/>
+          <p:nvPr/>
+        </p:nvSpPr>
+        <p:spPr>
+          <a:xfrm>
+            <a:off x="640080" y="4069080"/>
+            <a:ext cx="10911535" cy="1005840"/>
+          </a:xfrm>
+          <a:prstGeom prst="roundRect">
+            <a:avLst>
+              <a:gd name="adj" fmla="val 7000"/>
+            </a:avLst>
+          </a:prstGeom>
+          <a:solidFill>
+            <a:srgbClr val="EAF2FD"/>
+          </a:solidFill>
+          <a:ln>
+            <a:noFill/>
+          </a:ln>
+        </p:spPr>
+        <p:txBody>
+          <a:bodyPr rtlCol="0" anchor="ctr"/>
+          <a:lstStyle/>
+          <a:p>
+            <a:pPr algn="ctr"/>
+          </a:p>
+        </p:txBody>
+      </p:sp>
+      <p:sp>
+        <p:nvSpPr>
+          <p:cNvPr id="15" name="번호 3"/>
+          <p:cNvSpPr/>
+          <p:nvPr/>
+        </p:nvSpPr>
+        <p:spPr>
+          <a:xfrm>
+            <a:off x="822959" y="4343400"/>
+            <a:ext cx="457200" cy="457200"/>
+          </a:xfrm>
+          <a:prstGeom prst="ellipse">
+            <a:avLst/>
+          </a:prstGeom>
+          <a:solidFill>
+            <a:srgbClr val="97BBED"/>
+          </a:solidFill>
+          <a:ln>
+            <a:noFill/>
+          </a:ln>
+        </p:spPr>
+        <p:txBody>
+          <a:bodyPr rtlCol="0" anchor="ctr" wrap="square" lIns="54864" rIns="54864" tIns="27432" bIns="27432">
+            <a:noAutofit/>
+          </a:bodyPr>
+          <a:lstStyle/>
+          <a:p>
+            <a:pPr algn="ctr">
+              <a:lnSpc>
+                <a:spcPct val="100000"/>
+              </a:lnSpc>
+            </a:pPr>
+            <a:r>
+              <a:rPr sz="1600" b="1" i="0">
+                <a:solidFill>
+                  <a:srgbClr val="26231F"/>
+                </a:solidFill>
+              </a:rPr>
+              <a:t>3</a:t>
+            </a:r>
+          </a:p>
+        </p:txBody>
+      </p:sp>
+      <p:sp>
+        <p:nvSpPr>
+          <p:cNvPr id="16" name="TextBox 15"/>
+          <p:cNvSpPr txBox="1"/>
+          <p:nvPr/>
+        </p:nvSpPr>
+        <p:spPr>
+          <a:xfrm>
+            <a:off x="1508760" y="4114800"/>
+            <a:ext cx="2743200" cy="914400"/>
+          </a:xfrm>
+          <a:prstGeom prst="rect">
+            <a:avLst/>
+          </a:prstGeom>
+          <a:noFill/>
+        </p:spPr>
+        <p:txBody>
+          <a:bodyPr wrap="square" lIns="54864" rIns="54864" tIns="27432" bIns="27432" anchor="ctr">
+            <a:noAutofit/>
+          </a:bodyPr>
+          <a:lstStyle/>
+          <a:p>
+            <a:pPr algn="l">
+              <a:lnSpc>
+                <a:spcPct val="115000"/>
+              </a:lnSpc>
+            </a:pPr>
+            <a:r>
+              <a:rPr sz="1800" b="1" i="0">
+                <a:solidFill>
+                  <a:srgbClr val="273549"/>
+                </a:solidFill>
+              </a:rPr>
+              <a:t>약속 3</a:t>
+            </a:r>
+          </a:p>
+        </p:txBody>
+      </p:sp>
+      <p:sp>
+        <p:nvSpPr>
+          <p:cNvPr id="17" name="TextBox 16"/>
+          <p:cNvSpPr txBox="1"/>
+          <p:nvPr/>
+        </p:nvSpPr>
+        <p:spPr>
+          <a:xfrm>
+            <a:off x="4297680" y="4114800"/>
+            <a:ext cx="7071055" cy="914400"/>
+          </a:xfrm>
+          <a:prstGeom prst="rect">
+            <a:avLst/>
+          </a:prstGeom>
+          <a:noFill/>
+        </p:spPr>
+        <p:txBody>
+          <a:bodyPr wrap="square" lIns="54864" rIns="54864" tIns="27432" bIns="27432" anchor="ctr">
+            <a:noAutofit/>
+          </a:bodyPr>
+          <a:lstStyle/>
+          <a:p>
+            <a:pPr algn="l">
+              <a:lnSpc>
+                <a:spcPct val="115000"/>
+              </a:lnSpc>
+            </a:pPr>
+            <a:r>
+              <a:rPr sz="1700" b="0" i="0">
+                <a:solidFill>
+                  <a:srgbClr val="26231F"/>
                 </a:solidFill>
               </a:rPr>
               <a:t>한 달에 한 번 가족 식사</a:t>
@@ -5710,7 +5981,7 @@
     <p:bg>
       <p:bgPr>
         <a:solidFill>
-          <a:srgbClr val="F3F7FC"/>
+          <a:srgbClr val="FAFBFD"/>
         </a:solidFill>
         <a:effectLst/>
       </p:bgPr>
@@ -5729,18 +6000,82 @@
           <p:nvPr/>
         </p:nvSpPr>
         <p:spPr>
-          <a:xfrm rot="10800000">
-            <a:off x="10637215" y="0"/>
-            <a:ext cx="914400" cy="1554480"/>
-          </a:xfrm>
-          <a:prstGeom prst="round2SameRect">
-            <a:avLst>
-              <a:gd name="adj1" fmla="val 50000"/>
-              <a:gd name="adj2" fmla="val 0"/>
-            </a:avLst>
+          <a:xfrm>
+            <a:off x="640080" y="566928"/>
+            <a:ext cx="10911535" cy="10972"/>
+          </a:xfrm>
+          <a:prstGeom prst="rect">
+            <a:avLst/>
           </a:prstGeom>
           <a:solidFill>
-            <a:srgbClr val="D4E3F7"/>
+            <a:srgbClr val="26231F"/>
+          </a:solidFill>
+          <a:ln>
+            <a:noFill/>
+          </a:ln>
+        </p:spPr>
+        <p:txBody>
+          <a:bodyPr rtlCol="0" anchor="ctr"/>
+          <a:lstStyle/>
+          <a:p>
+            <a:pPr algn="ctr"/>
+          </a:p>
+        </p:txBody>
+      </p:sp>
+      <p:sp>
+        <p:nvSpPr>
+          <p:cNvPr id="4" name="상단 라벨"/>
+          <p:cNvSpPr txBox="1"/>
+          <p:nvPr/>
+        </p:nvSpPr>
+        <p:spPr>
+          <a:xfrm>
+            <a:off x="640080" y="237744"/>
+            <a:ext cx="5486400" cy="274320"/>
+          </a:xfrm>
+          <a:prstGeom prst="rect">
+            <a:avLst/>
+          </a:prstGeom>
+          <a:noFill/>
+        </p:spPr>
+        <p:txBody>
+          <a:bodyPr wrap="square" lIns="54864" rIns="54864" tIns="27432" bIns="27432" anchor="ctr">
+            <a:noAutofit/>
+          </a:bodyPr>
+          <a:lstStyle/>
+          <a:p>
+            <a:pPr algn="l">
+              <a:lnSpc>
+                <a:spcPct val="115000"/>
+              </a:lnSpc>
+            </a:pPr>
+            <a:r>
+              <a:rPr sz="900" b="1" i="0" spc="250">
+                <a:solidFill>
+                  <a:srgbClr val="26231F"/>
+                </a:solidFill>
+              </a:rPr>
+              <a:t>FAMILY ALBUM</a:t>
+            </a:r>
+          </a:p>
+        </p:txBody>
+      </p:sp>
+      <p:sp>
+        <p:nvSpPr>
+          <p:cNvPr id="5" name="포인트"/>
+          <p:cNvSpPr/>
+          <p:nvPr/>
+        </p:nvSpPr>
+        <p:spPr>
+          <a:xfrm>
+            <a:off x="11204143" y="246888"/>
+            <a:ext cx="237744" cy="237744"/>
+          </a:xfrm>
+          <a:prstGeom prst="donut">
+            <a:avLst/>
+          </a:prstGeom>
+          <a:solidFill>
+            <a:srgbClr val="97BBED"/>
           </a:solidFill>
           <a:ln>
             <a:noFill/>
@@ -5766,8 +6101,8 @@
         </p:nvSpPr>
         <p:spPr>
           <a:xfrm>
-            <a:off x="640080" y="457200"/>
-            <a:ext cx="9722815" cy="868680"/>
+            <a:off x="640080" y="731520"/>
+            <a:ext cx="10911535" cy="822960"/>
           </a:xfrm>
         </p:spPr>
         <p:txBody>
@@ -5784,7 +6119,7 @@
             <a:r>
               <a:rPr sz="3000" b="1" i="0">
                 <a:solidFill>
-                  <a:srgbClr val="1D4072"/>
+                  <a:srgbClr val="26231F"/>
                 </a:solidFill>
               </a:rPr>
               <a:t>가족 사진</a:t>
@@ -5794,14 +6129,14 @@
       </p:sp>
       <p:sp>
         <p:nvSpPr>
-          <p:cNvPr id="4" name="사진 자리"/>
+          <p:cNvPr id="6" name="사진 자리"/>
           <p:cNvSpPr/>
           <p:nvPr/>
         </p:nvSpPr>
         <p:spPr>
           <a:xfrm>
-            <a:off x="640080" y="1600200"/>
-            <a:ext cx="3515258" cy="2308860"/>
+            <a:off x="640080" y="1783080"/>
+            <a:ext cx="3515258" cy="2194560"/>
           </a:xfrm>
           <a:prstGeom prst="roundRect">
             <a:avLst>
@@ -5809,12 +6144,10 @@
             </a:avLst>
           </a:prstGeom>
           <a:solidFill>
-            <a:srgbClr val="D4E3F7"/>
+            <a:srgbClr val="D1E2FA"/>
           </a:solidFill>
           <a:ln w="19050">
-            <a:solidFill>
-              <a:srgbClr val="4981D0"/>
-            </a:solidFill>
+            <a:noFill/>
             <a:prstDash val="dash"/>
           </a:ln>
         </p:spPr>
@@ -5832,7 +6165,7 @@
             <a:r>
               <a:rPr sz="1200" b="0" i="0">
                 <a:solidFill>
-                  <a:srgbClr val="1D4072"/>
+                  <a:srgbClr val="8E8780"/>
                 </a:solidFill>
               </a:rPr>
               <a:t>사진 1</a:t>
@@ -5842,14 +6175,14 @@
       </p:sp>
       <p:sp>
         <p:nvSpPr>
-          <p:cNvPr id="5" name="사진 자리"/>
+          <p:cNvPr id="7" name="사진 자리"/>
           <p:cNvSpPr/>
           <p:nvPr/>
         </p:nvSpPr>
         <p:spPr>
           <a:xfrm>
-            <a:off x="4338218" y="1600200"/>
-            <a:ext cx="3515258" cy="2308860"/>
+            <a:off x="4338218" y="1783080"/>
+            <a:ext cx="3515258" cy="2194560"/>
           </a:xfrm>
           <a:prstGeom prst="roundRect">
             <a:avLst>
@@ -5857,12 +6190,10 @@
             </a:avLst>
           </a:prstGeom>
           <a:solidFill>
-            <a:srgbClr val="D4E3F7"/>
+            <a:srgbClr val="D1E2FA"/>
           </a:solidFill>
           <a:ln w="19050">
-            <a:solidFill>
-              <a:srgbClr val="4981D0"/>
-            </a:solidFill>
+            <a:noFill/>
             <a:prstDash val="dash"/>
           </a:ln>
         </p:spPr>
@@ -5880,7 +6211,7 @@
             <a:r>
               <a:rPr sz="1200" b="0" i="0">
                 <a:solidFill>
-                  <a:srgbClr val="1D4072"/>
+                  <a:srgbClr val="8E8780"/>
                 </a:solidFill>
               </a:rPr>
               <a:t>사진 2</a:t>
@@ -5890,14 +6221,14 @@
       </p:sp>
       <p:sp>
         <p:nvSpPr>
-          <p:cNvPr id="6" name="사진 자리"/>
+          <p:cNvPr id="8" name="사진 자리"/>
           <p:cNvSpPr/>
           <p:nvPr/>
         </p:nvSpPr>
         <p:spPr>
           <a:xfrm>
-            <a:off x="8036356" y="1600200"/>
-            <a:ext cx="3515258" cy="2308860"/>
+            <a:off x="8036356" y="1783080"/>
+            <a:ext cx="3515258" cy="2194560"/>
           </a:xfrm>
           <a:prstGeom prst="roundRect">
             <a:avLst>
@@ -5905,12 +6236,10 @@
             </a:avLst>
           </a:prstGeom>
           <a:solidFill>
-            <a:srgbClr val="D4E3F7"/>
+            <a:srgbClr val="D1E2FA"/>
           </a:solidFill>
           <a:ln w="19050">
-            <a:solidFill>
-              <a:srgbClr val="4981D0"/>
-            </a:solidFill>
+            <a:noFill/>
             <a:prstDash val="dash"/>
           </a:ln>
         </p:spPr>
@@ -5928,7 +6257,7 @@
             <a:r>
               <a:rPr sz="1200" b="0" i="0">
                 <a:solidFill>
-                  <a:srgbClr val="1D4072"/>
+                  <a:srgbClr val="8E8780"/>
                 </a:solidFill>
               </a:rPr>
               <a:t>사진 3</a:t>
@@ -5938,14 +6267,14 @@
       </p:sp>
       <p:sp>
         <p:nvSpPr>
-          <p:cNvPr id="7" name="사진 자리"/>
+          <p:cNvPr id="9" name="사진 자리"/>
           <p:cNvSpPr/>
           <p:nvPr/>
         </p:nvSpPr>
         <p:spPr>
           <a:xfrm>
-            <a:off x="640080" y="4091939"/>
-            <a:ext cx="3515258" cy="2308860"/>
+            <a:off x="640080" y="4160520"/>
+            <a:ext cx="3515258" cy="2194560"/>
           </a:xfrm>
           <a:prstGeom prst="roundRect">
             <a:avLst>
@@ -5953,12 +6282,10 @@
             </a:avLst>
           </a:prstGeom>
           <a:solidFill>
-            <a:srgbClr val="D4E3F7"/>
+            <a:srgbClr val="D1E2FA"/>
           </a:solidFill>
           <a:ln w="19050">
-            <a:solidFill>
-              <a:srgbClr val="4981D0"/>
-            </a:solidFill>
+            <a:noFill/>
             <a:prstDash val="dash"/>
           </a:ln>
         </p:spPr>
@@ -5976,7 +6303,7 @@
             <a:r>
               <a:rPr sz="1200" b="0" i="0">
                 <a:solidFill>
-                  <a:srgbClr val="1D4072"/>
+                  <a:srgbClr val="8E8780"/>
                 </a:solidFill>
               </a:rPr>
               <a:t>사진 4</a:t>
@@ -5986,14 +6313,14 @@
       </p:sp>
       <p:sp>
         <p:nvSpPr>
-          <p:cNvPr id="8" name="사진 자리"/>
+          <p:cNvPr id="10" name="사진 자리"/>
           <p:cNvSpPr/>
           <p:nvPr/>
         </p:nvSpPr>
         <p:spPr>
           <a:xfrm>
-            <a:off x="4338218" y="4091939"/>
-            <a:ext cx="3515258" cy="2308860"/>
+            <a:off x="4338218" y="4160520"/>
+            <a:ext cx="3515258" cy="2194560"/>
           </a:xfrm>
           <a:prstGeom prst="roundRect">
             <a:avLst>
@@ -6001,12 +6328,10 @@
             </a:avLst>
           </a:prstGeom>
           <a:solidFill>
-            <a:srgbClr val="D4E3F7"/>
+            <a:srgbClr val="D1E2FA"/>
           </a:solidFill>
           <a:ln w="19050">
-            <a:solidFill>
-              <a:srgbClr val="4981D0"/>
-            </a:solidFill>
+            <a:noFill/>
             <a:prstDash val="dash"/>
           </a:ln>
         </p:spPr>
@@ -6024,7 +6349,7 @@
             <a:r>
               <a:rPr sz="1200" b="0" i="0">
                 <a:solidFill>
-                  <a:srgbClr val="1D4072"/>
+                  <a:srgbClr val="8E8780"/>
                 </a:solidFill>
               </a:rPr>
               <a:t>사진 5</a:t>
@@ -6034,14 +6359,14 @@
       </p:sp>
       <p:sp>
         <p:nvSpPr>
-          <p:cNvPr id="9" name="사진 자리"/>
+          <p:cNvPr id="11" name="사진 자리"/>
           <p:cNvSpPr/>
           <p:nvPr/>
         </p:nvSpPr>
         <p:spPr>
           <a:xfrm>
-            <a:off x="8036356" y="4091939"/>
-            <a:ext cx="3515258" cy="2308860"/>
+            <a:off x="8036356" y="4160520"/>
+            <a:ext cx="3515258" cy="2194560"/>
           </a:xfrm>
           <a:prstGeom prst="roundRect">
             <a:avLst>
@@ -6049,12 +6374,10 @@
             </a:avLst>
           </a:prstGeom>
           <a:solidFill>
-            <a:srgbClr val="D4E3F7"/>
+            <a:srgbClr val="D1E2FA"/>
           </a:solidFill>
           <a:ln w="19050">
-            <a:solidFill>
-              <a:srgbClr val="4981D0"/>
-            </a:solidFill>
+            <a:noFill/>
             <a:prstDash val="dash"/>
           </a:ln>
         </p:spPr>
@@ -6072,7 +6395,7 @@
             <a:r>
               <a:rPr sz="1200" b="0" i="0">
                 <a:solidFill>
-                  <a:srgbClr val="1D4072"/>
+                  <a:srgbClr val="8E8780"/>
                 </a:solidFill>
               </a:rPr>
               <a:t>사진 6</a:t>
@@ -6091,6 +6414,14 @@
 <file path=ppt/slides/slide6.xml><?xml version="1.0" encoding="utf-8"?>
 <p:sld xmlns:a="http://schemas.openxmlformats.org/drawingml/2006/main" xmlns:p="http://schemas.openxmlformats.org/presentationml/2006/main" xmlns:r="http://schemas.openxmlformats.org/officeDocument/2006/relationships">
   <p:cSld>
+    <p:bg>
+      <p:bgPr>
+        <a:solidFill>
+          <a:srgbClr val="EAF2FD"/>
+        </a:solidFill>
+        <a:effectLst/>
+      </p:bgPr>
+    </p:bg>
     <p:spTree>
       <p:nvGrpSpPr>
         <p:cNvPr id="1" name=""/>
@@ -6098,30 +6429,119 @@
         <p:nvPr/>
       </p:nvGrpSpPr>
       <p:grpSpPr/>
-      <p:pic>
-        <p:nvPicPr>
-          <p:cNvPr id="3" name="표지 그림" descr="family-08.jpg"/>
-          <p:cNvPicPr>
-            <a:picLocks noChangeAspect="1"/>
-          </p:cNvPicPr>
-          <p:nvPr/>
-        </p:nvPicPr>
-        <p:blipFill>
-          <a:blip r:embed="rId2"/>
-          <a:stretch>
-            <a:fillRect/>
-          </a:stretch>
-        </p:blipFill>
-        <p:spPr>
-          <a:xfrm>
-            <a:off x="0" y="0"/>
-            <a:ext cx="12191695" cy="6858000"/>
+      <p:sp>
+        <p:nvSpPr>
+          <p:cNvPr id="3" name="사진 자리"/>
+          <p:cNvSpPr/>
+          <p:nvPr/>
+        </p:nvSpPr>
+        <p:spPr>
+          <a:xfrm>
+            <a:off x="7558851" y="685800"/>
+            <a:ext cx="3169840" cy="5486400"/>
+          </a:xfrm>
+          <a:prstGeom prst="round2SameRect">
+            <a:avLst>
+              <a:gd name="adj1" fmla="val 50000"/>
+              <a:gd name="adj2" fmla="val 0"/>
+            </a:avLst>
+          </a:prstGeom>
+          <a:solidFill>
+            <a:srgbClr val="A6C6F2"/>
+          </a:solidFill>
+          <a:ln>
+            <a:noFill/>
+          </a:ln>
+        </p:spPr>
+        <p:txBody>
+          <a:bodyPr rtlCol="0" anchor="ctr" wrap="square" lIns="54864" rIns="54864" tIns="27432" bIns="27432">
+            <a:noAutofit/>
+          </a:bodyPr>
+          <a:lstStyle/>
+          <a:p>
+            <a:pPr algn="ctr">
+              <a:lnSpc>
+                <a:spcPct val="100000"/>
+              </a:lnSpc>
+            </a:pPr>
+            <a:r>
+              <a:rPr sz="1400" b="0" i="0">
+                <a:solidFill>
+                  <a:srgbClr val="273549"/>
+                </a:solidFill>
+              </a:rPr>
+              <a:t>사진을 넣어 주세요</a:t>
+            </a:r>
+          </a:p>
+        </p:txBody>
+      </p:sp>
+      <p:sp>
+        <p:nvSpPr>
+          <p:cNvPr id="4" name="장식"/>
+          <p:cNvSpPr/>
+          <p:nvPr/>
+        </p:nvSpPr>
+        <p:spPr>
+          <a:xfrm>
+            <a:off x="6827349" y="4251960"/>
+            <a:ext cx="1005840" cy="1005840"/>
+          </a:xfrm>
+          <a:prstGeom prst="ellipse">
+            <a:avLst/>
+          </a:prstGeom>
+          <a:solidFill>
+            <a:srgbClr val="A6C6F2"/>
+          </a:solidFill>
+          <a:ln>
+            <a:noFill/>
+          </a:ln>
+        </p:spPr>
+        <p:txBody>
+          <a:bodyPr rtlCol="0" anchor="ctr"/>
+          <a:lstStyle/>
+          <a:p>
+            <a:pPr algn="ctr"/>
+          </a:p>
+        </p:txBody>
+      </p:sp>
+      <p:sp>
+        <p:nvSpPr>
+          <p:cNvPr id="5" name="라벨"/>
+          <p:cNvSpPr txBox="1"/>
+          <p:nvPr/>
+        </p:nvSpPr>
+        <p:spPr>
+          <a:xfrm>
+            <a:off x="822960" y="2148840"/>
+            <a:ext cx="5608179" cy="274320"/>
           </a:xfrm>
           <a:prstGeom prst="rect">
             <a:avLst/>
           </a:prstGeom>
-        </p:spPr>
-      </p:pic>
+          <a:noFill/>
+        </p:spPr>
+        <p:txBody>
+          <a:bodyPr wrap="square" lIns="54864" rIns="54864" tIns="27432" bIns="27432" anchor="t">
+            <a:noAutofit/>
+          </a:bodyPr>
+          <a:lstStyle/>
+          <a:p>
+            <a:pPr algn="l">
+              <a:lnSpc>
+                <a:spcPct val="115000"/>
+              </a:lnSpc>
+            </a:pPr>
+            <a:r>
+              <a:rPr sz="1000" b="1" i="0" spc="250">
+                <a:solidFill>
+                  <a:srgbClr val="26231F"/>
+                </a:solidFill>
+              </a:rPr>
+              <a:t>FAMILY ALBUM</a:t>
+            </a:r>
+          </a:p>
+        </p:txBody>
+      </p:sp>
       <p:sp>
         <p:nvSpPr>
           <p:cNvPr id="2" name="Title 1"/>
@@ -6134,8 +6554,8 @@
         </p:nvSpPr>
         <p:spPr>
           <a:xfrm>
-            <a:off x="853418" y="2057400"/>
-            <a:ext cx="6095847" cy="1554480"/>
+            <a:off x="822960" y="2606040"/>
+            <a:ext cx="5608179" cy="1188720"/>
           </a:xfrm>
         </p:spPr>
         <p:txBody>
@@ -6150,9 +6570,9 @@
               </a:lnSpc>
             </a:pPr>
             <a:r>
-              <a:rPr sz="3600" b="1" i="0">
-                <a:solidFill>
-                  <a:srgbClr val="1D4072"/>
+              <a:rPr sz="4000" b="1" i="0">
+                <a:solidFill>
+                  <a:srgbClr val="26231F"/>
                 </a:solidFill>
               </a:rPr>
               <a:t>우리 가족 소개를 마칩니다</a:t>
@@ -6162,14 +6582,14 @@
       </p:sp>
       <p:sp>
         <p:nvSpPr>
-          <p:cNvPr id="4" name="한 줄 문구"/>
+          <p:cNvPr id="6" name="한 줄 문구"/>
           <p:cNvSpPr txBox="1"/>
           <p:nvPr/>
         </p:nvSpPr>
         <p:spPr>
           <a:xfrm>
-            <a:off x="853418" y="3749039"/>
-            <a:ext cx="6095847" cy="822960"/>
+            <a:off x="822960" y="3886200"/>
+            <a:ext cx="5608179" cy="822960"/>
           </a:xfrm>
           <a:prstGeom prst="rect">
             <a:avLst/>
@@ -6188,9 +6608,9 @@
               </a:lnSpc>
             </a:pPr>
             <a:r>
-              <a:rPr sz="1700" b="0" i="1">
-                <a:solidFill>
-                  <a:srgbClr val="1D4072"/>
+              <a:rPr sz="1700" b="0" i="0">
+                <a:solidFill>
+                  <a:srgbClr val="26231F"/>
                 </a:solidFill>
               </a:rPr>
               <a:t>읽어 주셔서 고맙습니다</a:t>
@@ -6200,14 +6620,14 @@
       </p:sp>
       <p:sp>
         <p:nvSpPr>
-          <p:cNvPr id="5" name="안내 문구"/>
+          <p:cNvPr id="7" name="안내 문구"/>
           <p:cNvSpPr txBox="1"/>
           <p:nvPr/>
         </p:nvSpPr>
         <p:spPr>
           <a:xfrm>
-            <a:off x="853418" y="4617720"/>
-            <a:ext cx="6095847" cy="914400"/>
+            <a:off x="822960" y="4754880"/>
+            <a:ext cx="5608179" cy="914400"/>
           </a:xfrm>
           <a:prstGeom prst="rect">
             <a:avLst/>
@@ -6228,7 +6648,7 @@
             <a:r>
               <a:rPr sz="1400" b="0" i="0">
                 <a:solidFill>
-                  <a:srgbClr val="666666"/>
+                  <a:srgbClr val="26231F"/>
                 </a:solidFill>
               </a:rPr>
               <a:t>고맙습니다 · 가족 이름</a:t>
@@ -6255,34 +6675,34 @@
         <a:sysClr val="window" lastClr="FFFFFF"/>
       </a:lt1>
       <a:dk2>
-        <a:srgbClr val="1D4072"/>
+        <a:srgbClr val="273549"/>
       </a:dk2>
       <a:lt2>
-        <a:srgbClr val="F3F7FC"/>
+        <a:srgbClr val="EAF2FD"/>
       </a:lt2>
       <a:accent1>
-        <a:srgbClr val="4981D0"/>
+        <a:srgbClr val="97BBED"/>
       </a:accent1>
       <a:accent2>
-        <a:srgbClr val="339941"/>
+        <a:srgbClr val="BCBAF3"/>
       </a:accent2>
       <a:accent3>
-        <a:srgbClr val="1D4072"/>
+        <a:srgbClr val="273549"/>
       </a:accent3>
       <a:accent4>
-        <a:srgbClr val="D4E3F7"/>
+        <a:srgbClr val="D1E2FA"/>
       </a:accent4>
       <a:accent5>
-        <a:srgbClr val="3E8D88"/>
+        <a:srgbClr val="AABAF0"/>
       </a:accent5>
       <a:accent6>
-        <a:srgbClr val="778CAA"/>
+        <a:srgbClr val="7D8692"/>
       </a:accent6>
       <a:hlink>
-        <a:srgbClr val="4981D0"/>
+        <a:srgbClr val="97BBED"/>
       </a:hlink>
       <a:folHlink>
-        <a:srgbClr val="1D4072"/>
+        <a:srgbClr val="273549"/>
       </a:folHlink>
     </a:clrScheme>
     <a:fontScheme name="Office">
